--- a/exports/pptx/lessons/primary-module-11-multiplication-near-base/day-04-why-it-works.pptx
+++ b/exports/pptx/lessons/primary-module-11-multiplication-near-base/day-04-why-it-works.pptx
@@ -15,9 +15,12 @@
     <p:sldId id="263" r:id="rId9"/>
     <p:sldId id="264" r:id="rId10"/>
     <p:sldId id="265" r:id="rId11"/>
+    <p:sldId id="266" r:id="rId12"/>
+    <p:sldId id="267" r:id="rId13"/>
+    <p:sldId id="268" r:id="rId14"/>
   </p:sldIdLst>
   <p:notesMasterIdLst>
-    <p:notesMasterId r:id="rId12"/>
+    <p:notesMasterId r:id="rId15"/>
   </p:notesMasterIdLst>
   <p:sldSz cx="9144000" cy="5143500"/>
   <p:notesSz cx="5143500" cy="9144000"/>
@@ -623,6 +626,270 @@
             <a:fld id="{F7021451-1387-4CA6-816F-3879F97B5CBC}" type="slidenum">
               <a:rPr lang="en-US"/>
               <a:t>10</a:t>
+            </a:fld>
+            <a:endParaRPr lang="en-US"/>
+          </a:p>
+        </p:txBody>
+      </p:sp>
+    </p:spTree>
+    <p:extLst>
+      <p:ext uri="{BB962C8B-B14F-4D97-AF65-F5344CB8AC3E}">
+        <p14:creationId xmlns:p14="http://schemas.microsoft.com/office/powerpoint/2010/main" val="1024086991"/>
+      </p:ext>
+    </p:extLst>
+  </p:cSld>
+  <p:clrMapOvr>
+    <a:masterClrMapping/>
+  </p:clrMapOvr>
+</p:notes>
+</file>
+
+<file path=ppt/notesSlides/notesSlide11.xml><?xml version="1.0" encoding="utf-8"?>
+<p:notes xmlns:a="http://schemas.openxmlformats.org/drawingml/2006/main" xmlns:r="http://schemas.openxmlformats.org/officeDocument/2006/relationships" xmlns:p="http://schemas.openxmlformats.org/presentationml/2006/main">
+  <p:cSld>
+    <p:spTree>
+      <p:nvGrpSpPr>
+        <p:cNvPr id="1" name=""/>
+        <p:cNvGrpSpPr/>
+        <p:nvPr/>
+      </p:nvGrpSpPr>
+      <p:grpSpPr>
+        <a:xfrm>
+          <a:off x="0" y="0"/>
+          <a:ext cx="0" cy="0"/>
+          <a:chOff x="0" y="0"/>
+          <a:chExt cx="0" cy="0"/>
+        </a:xfrm>
+      </p:grpSpPr>
+      <p:sp>
+        <p:nvSpPr>
+          <p:cNvPr id="2" name="Slide Image Placeholder 1"/>
+          <p:cNvSpPr>
+            <a:spLocks noGrp="1" noRot="1" noChangeAspect="1"/>
+          </p:cNvSpPr>
+          <p:nvPr>
+            <p:ph type="sldImg"/>
+          </p:nvPr>
+        </p:nvSpPr>
+        <p:spPr/>
+      </p:sp>
+      <p:sp>
+        <p:nvSpPr>
+          <p:cNvPr id="3" name="Notes Placeholder 2"/>
+          <p:cNvSpPr>
+            <a:spLocks noGrp="1"/>
+          </p:cNvSpPr>
+          <p:nvPr>
+            <p:ph type="body" idx="1"/>
+          </p:nvPr>
+        </p:nvSpPr>
+        <p:spPr/>
+        <p:txBody>
+          <a:bodyPr/>
+          <a:lstStyle/>
+          <a:p>
+            <a:r>
+              <a:rPr lang="en-US" dirty="0"/>
+              <a:t/>
+            </a:r>
+            <a:endParaRPr lang="en-US" dirty="0"/>
+          </a:p>
+        </p:txBody>
+      </p:sp>
+      <p:sp>
+        <p:nvSpPr>
+          <p:cNvPr id="4" name="Slide Number Placeholder 3"/>
+          <p:cNvSpPr>
+            <a:spLocks noGrp="1"/>
+          </p:cNvSpPr>
+          <p:nvPr>
+            <p:ph type="sldNum" sz="quarter" idx="10"/>
+          </p:nvPr>
+        </p:nvSpPr>
+        <p:spPr/>
+        <p:txBody>
+          <a:bodyPr/>
+          <a:lstStyle/>
+          <a:p>
+            <a:fld id="{F7021451-1387-4CA6-816F-3879F97B5CBC}" type="slidenum">
+              <a:rPr lang="en-US"/>
+              <a:t>11</a:t>
+            </a:fld>
+            <a:endParaRPr lang="en-US"/>
+          </a:p>
+        </p:txBody>
+      </p:sp>
+    </p:spTree>
+    <p:extLst>
+      <p:ext uri="{BB962C8B-B14F-4D97-AF65-F5344CB8AC3E}">
+        <p14:creationId xmlns:p14="http://schemas.microsoft.com/office/powerpoint/2010/main" val="1024086991"/>
+      </p:ext>
+    </p:extLst>
+  </p:cSld>
+  <p:clrMapOvr>
+    <a:masterClrMapping/>
+  </p:clrMapOvr>
+</p:notes>
+</file>
+
+<file path=ppt/notesSlides/notesSlide12.xml><?xml version="1.0" encoding="utf-8"?>
+<p:notes xmlns:a="http://schemas.openxmlformats.org/drawingml/2006/main" xmlns:r="http://schemas.openxmlformats.org/officeDocument/2006/relationships" xmlns:p="http://schemas.openxmlformats.org/presentationml/2006/main">
+  <p:cSld>
+    <p:spTree>
+      <p:nvGrpSpPr>
+        <p:cNvPr id="1" name=""/>
+        <p:cNvGrpSpPr/>
+        <p:nvPr/>
+      </p:nvGrpSpPr>
+      <p:grpSpPr>
+        <a:xfrm>
+          <a:off x="0" y="0"/>
+          <a:ext cx="0" cy="0"/>
+          <a:chOff x="0" y="0"/>
+          <a:chExt cx="0" cy="0"/>
+        </a:xfrm>
+      </p:grpSpPr>
+      <p:sp>
+        <p:nvSpPr>
+          <p:cNvPr id="2" name="Slide Image Placeholder 1"/>
+          <p:cNvSpPr>
+            <a:spLocks noGrp="1" noRot="1" noChangeAspect="1"/>
+          </p:cNvSpPr>
+          <p:nvPr>
+            <p:ph type="sldImg"/>
+          </p:nvPr>
+        </p:nvSpPr>
+        <p:spPr/>
+      </p:sp>
+      <p:sp>
+        <p:nvSpPr>
+          <p:cNvPr id="3" name="Notes Placeholder 2"/>
+          <p:cNvSpPr>
+            <a:spLocks noGrp="1"/>
+          </p:cNvSpPr>
+          <p:nvPr>
+            <p:ph type="body" idx="1"/>
+          </p:nvPr>
+        </p:nvSpPr>
+        <p:spPr/>
+        <p:txBody>
+          <a:bodyPr/>
+          <a:lstStyle/>
+          <a:p>
+            <a:r>
+              <a:rPr lang="en-US" dirty="0"/>
+              <a:t/>
+            </a:r>
+            <a:endParaRPr lang="en-US" dirty="0"/>
+          </a:p>
+        </p:txBody>
+      </p:sp>
+      <p:sp>
+        <p:nvSpPr>
+          <p:cNvPr id="4" name="Slide Number Placeholder 3"/>
+          <p:cNvSpPr>
+            <a:spLocks noGrp="1"/>
+          </p:cNvSpPr>
+          <p:nvPr>
+            <p:ph type="sldNum" sz="quarter" idx="10"/>
+          </p:nvPr>
+        </p:nvSpPr>
+        <p:spPr/>
+        <p:txBody>
+          <a:bodyPr/>
+          <a:lstStyle/>
+          <a:p>
+            <a:fld id="{F7021451-1387-4CA6-816F-3879F97B5CBC}" type="slidenum">
+              <a:rPr lang="en-US"/>
+              <a:t>12</a:t>
+            </a:fld>
+            <a:endParaRPr lang="en-US"/>
+          </a:p>
+        </p:txBody>
+      </p:sp>
+    </p:spTree>
+    <p:extLst>
+      <p:ext uri="{BB962C8B-B14F-4D97-AF65-F5344CB8AC3E}">
+        <p14:creationId xmlns:p14="http://schemas.microsoft.com/office/powerpoint/2010/main" val="1024086991"/>
+      </p:ext>
+    </p:extLst>
+  </p:cSld>
+  <p:clrMapOvr>
+    <a:masterClrMapping/>
+  </p:clrMapOvr>
+</p:notes>
+</file>
+
+<file path=ppt/notesSlides/notesSlide13.xml><?xml version="1.0" encoding="utf-8"?>
+<p:notes xmlns:a="http://schemas.openxmlformats.org/drawingml/2006/main" xmlns:r="http://schemas.openxmlformats.org/officeDocument/2006/relationships" xmlns:p="http://schemas.openxmlformats.org/presentationml/2006/main">
+  <p:cSld>
+    <p:spTree>
+      <p:nvGrpSpPr>
+        <p:cNvPr id="1" name=""/>
+        <p:cNvGrpSpPr/>
+        <p:nvPr/>
+      </p:nvGrpSpPr>
+      <p:grpSpPr>
+        <a:xfrm>
+          <a:off x="0" y="0"/>
+          <a:ext cx="0" cy="0"/>
+          <a:chOff x="0" y="0"/>
+          <a:chExt cx="0" cy="0"/>
+        </a:xfrm>
+      </p:grpSpPr>
+      <p:sp>
+        <p:nvSpPr>
+          <p:cNvPr id="2" name="Slide Image Placeholder 1"/>
+          <p:cNvSpPr>
+            <a:spLocks noGrp="1" noRot="1" noChangeAspect="1"/>
+          </p:cNvSpPr>
+          <p:nvPr>
+            <p:ph type="sldImg"/>
+          </p:nvPr>
+        </p:nvSpPr>
+        <p:spPr/>
+      </p:sp>
+      <p:sp>
+        <p:nvSpPr>
+          <p:cNvPr id="3" name="Notes Placeholder 2"/>
+          <p:cNvSpPr>
+            <a:spLocks noGrp="1"/>
+          </p:cNvSpPr>
+          <p:nvPr>
+            <p:ph type="body" idx="1"/>
+          </p:nvPr>
+        </p:nvSpPr>
+        <p:spPr/>
+        <p:txBody>
+          <a:bodyPr/>
+          <a:lstStyle/>
+          <a:p>
+            <a:r>
+              <a:rPr lang="en-US" dirty="0"/>
+              <a:t/>
+            </a:r>
+            <a:endParaRPr lang="en-US" dirty="0"/>
+          </a:p>
+        </p:txBody>
+      </p:sp>
+      <p:sp>
+        <p:nvSpPr>
+          <p:cNvPr id="4" name="Slide Number Placeholder 3"/>
+          <p:cNvSpPr>
+            <a:spLocks noGrp="1"/>
+          </p:cNvSpPr>
+          <p:nvPr>
+            <p:ph type="sldNum" sz="quarter" idx="10"/>
+          </p:nvPr>
+        </p:nvSpPr>
+        <p:spPr/>
+        <p:txBody>
+          <a:bodyPr/>
+          <a:lstStyle/>
+          <a:p>
+            <a:fld id="{F7021451-1387-4CA6-816F-3879F97B5CBC}" type="slidenum">
+              <a:rPr lang="en-US"/>
+              <a:t>13</a:t>
             </a:fld>
             <a:endParaRPr lang="en-US"/>
           </a:p>
@@ -1876,194 +2143,6 @@
         </p:nvSpPr>
         <p:spPr>
           <a:xfrm>
-            <a:off x="406301" y="1223963"/>
-            <a:ext cx="8498026" cy="274290"/>
-          </a:xfrm>
-          <a:prstGeom prst="rect">
-            <a:avLst/>
-          </a:prstGeom>
-          <a:noFill/>
-          <a:ln/>
-        </p:spPr>
-        <p:txBody>
-          <a:bodyPr wrap="square" lIns="0" tIns="0" rIns="0" bIns="0" rtlCol="0" anchor="t"/>
-          <a:lstStyle/>
-          <a:p>
-            <a:pPr algn="l" indent="0" marL="0">
-              <a:lnSpc>
-                <a:spcPts val="2160"/>
-              </a:lnSpc>
-              <a:spcBef>
-                <a:spcPts val="600"/>
-              </a:spcBef>
-              <a:spcAft>
-                <a:spcPts val="800"/>
-              </a:spcAft>
-              <a:buNone/>
-            </a:pPr>
-            <a:r>
-              <a:rPr lang="en-US" sz="1800" b="1" dirty="0">
-                <a:solidFill>
-                  <a:srgbClr val="E07A5F"/>
-                </a:solidFill>
-                <a:latin typeface="Georgia" pitchFamily="34" charset="0"/>
-                <a:ea typeface="Georgia" pitchFamily="34" charset="-122"/>
-                <a:cs typeface="Georgia" pitchFamily="34" charset="-120"/>
-              </a:rPr>
-              <a:t>Goal</a:t>
-            </a:r>
-            <a:endParaRPr lang="en-US" sz="1800" dirty="0"/>
-          </a:p>
-        </p:txBody>
-      </p:sp>
-      <p:sp>
-        <p:nvSpPr>
-          <p:cNvPr id="6" name="Text 4"/>
-          <p:cNvSpPr/>
-          <p:nvPr/>
-        </p:nvSpPr>
-        <p:spPr>
-          <a:xfrm>
-            <a:off x="406301" y="1637854"/>
-            <a:ext cx="8498026" cy="445591"/>
-          </a:xfrm>
-          <a:prstGeom prst="rect">
-            <a:avLst/>
-          </a:prstGeom>
-          <a:noFill/>
-          <a:ln/>
-        </p:spPr>
-        <p:txBody>
-          <a:bodyPr wrap="square" lIns="0" tIns="0" rIns="0" bIns="0" rtlCol="0" anchor="t"/>
-          <a:lstStyle/>
-          <a:p>
-            <a:pPr algn="l" indent="0" marL="0">
-              <a:lnSpc>
-                <a:spcPts val="1680"/>
-              </a:lnSpc>
-              <a:spcBef>
-                <a:spcPts val="300"/>
-              </a:spcBef>
-              <a:spcAft>
-                <a:spcPts val="300"/>
-              </a:spcAft>
-              <a:buNone/>
-            </a:pPr>
-            <a:r>
-              <a:rPr lang="en-US" sz="1200" dirty="0">
-                <a:solidFill>
-                  <a:srgbClr val="2C2C2C"/>
-                </a:solidFill>
-                <a:latin typeface="Verdana" pitchFamily="34" charset="0"/>
-                <a:ea typeface="Verdana" pitchFamily="34" charset="-122"/>
-                <a:cs typeface="Verdana" pitchFamily="34" charset="-120"/>
-              </a:rPr>
-              <a:t>Children draw a dot pattern showing why </a:t>
-            </a:r>
-            <a:pPr algn="l" indent="0" marL="0">
-              <a:lnSpc>
-                <a:spcPts val="1680"/>
-              </a:lnSpc>
-              <a:spcBef>
-                <a:spcPts val="300"/>
-              </a:spcBef>
-              <a:spcAft>
-                <a:spcPts val="300"/>
-              </a:spcAft>
-              <a:buNone/>
-            </a:pPr>
-            <a:r>
-              <a:rPr lang="en-US" sz="1200" dirty="0">
-                <a:solidFill>
-                  <a:srgbClr val="2C2C2C"/>
-                </a:solidFill>
-                <a:latin typeface="Verdana" pitchFamily="34" charset="0"/>
-                <a:ea typeface="Verdana" pitchFamily="34" charset="-122"/>
-                <a:cs typeface="Verdana" pitchFamily="34" charset="-120"/>
-              </a:rPr>
-              <a:t>7 × 8 = 56</a:t>
-            </a:r>
-            <a:pPr algn="l" indent="0" marL="0">
-              <a:lnSpc>
-                <a:spcPts val="1680"/>
-              </a:lnSpc>
-              <a:spcBef>
-                <a:spcPts val="300"/>
-              </a:spcBef>
-              <a:spcAft>
-                <a:spcPts val="300"/>
-              </a:spcAft>
-              <a:buNone/>
-            </a:pPr>
-            <a:r>
-              <a:rPr lang="en-US" sz="1200" dirty="0">
-                <a:solidFill>
-                  <a:srgbClr val="2C2C2C"/>
-                </a:solidFill>
-                <a:latin typeface="Verdana" pitchFamily="34" charset="0"/>
-                <a:ea typeface="Verdana" pitchFamily="34" charset="-122"/>
-                <a:cs typeface="Verdana" pitchFamily="34" charset="-120"/>
-              </a:rPr>
-              <a:t> and </a:t>
-            </a:r>
-            <a:pPr algn="l" indent="0" marL="0">
-              <a:lnSpc>
-                <a:spcPts val="1680"/>
-              </a:lnSpc>
-              <a:spcBef>
-                <a:spcPts val="300"/>
-              </a:spcBef>
-              <a:spcAft>
-                <a:spcPts val="300"/>
-              </a:spcAft>
-              <a:buNone/>
-            </a:pPr>
-            <a:r>
-              <a:rPr lang="en-US" sz="1200" i="1" dirty="0">
-                <a:solidFill>
-                  <a:srgbClr val="2C2C2C"/>
-                </a:solidFill>
-                <a:latin typeface="Verdana" pitchFamily="34" charset="0"/>
-                <a:ea typeface="Verdana" pitchFamily="34" charset="-122"/>
-                <a:cs typeface="Verdana" pitchFamily="34" charset="-120"/>
-              </a:rPr>
-              <a:t>see</a:t>
-            </a:r>
-            <a:pPr algn="l" indent="0" marL="0">
-              <a:lnSpc>
-                <a:spcPts val="1680"/>
-              </a:lnSpc>
-              <a:spcBef>
-                <a:spcPts val="300"/>
-              </a:spcBef>
-              <a:spcAft>
-                <a:spcPts val="300"/>
-              </a:spcAft>
-              <a:buNone/>
-            </a:pPr>
-            <a:r>
-              <a:rPr lang="en-US" sz="1200" dirty="0">
-                <a:solidFill>
-                  <a:srgbClr val="2C2C2C"/>
-                </a:solidFill>
-                <a:latin typeface="Verdana" pitchFamily="34" charset="0"/>
-                <a:ea typeface="Verdana" pitchFamily="34" charset="-122"/>
-                <a:cs typeface="Verdana" pitchFamily="34" charset="-120"/>
-              </a:rPr>
-              <a:t> the connection between fingers and the answer.</a:t>
-            </a:r>
-            <a:endParaRPr lang="en-US" sz="1200" dirty="0"/>
-          </a:p>
-        </p:txBody>
-      </p:sp>
-      <p:sp>
-        <p:nvSpPr>
-          <p:cNvPr id="7" name="Text 5"/>
-          <p:cNvSpPr/>
-          <p:nvPr/>
-        </p:nvSpPr>
-        <p:spPr>
-          <a:xfrm>
             <a:off x="406301" y="4434929"/>
             <a:ext cx="8498026" cy="213271"/>
           </a:xfrm>
@@ -2208,7 +2287,7 @@
                 <a:ea typeface="Georgia" pitchFamily="34" charset="-122"/>
                 <a:cs typeface="Georgia" pitchFamily="34" charset="-120"/>
               </a:rPr>
-              <a:t>Teacher's quick notes</a:t>
+              <a:t>Show + chant (5 min)</a:t>
             </a:r>
             <a:endParaRPr lang="en-US" sz="1800" dirty="0"/>
           </a:p>
@@ -2222,8 +2301,8 @@
         </p:nvSpPr>
         <p:spPr>
           <a:xfrm>
-            <a:off x="406301" y="870942"/>
-            <a:ext cx="8498026" cy="639812"/>
+            <a:off x="634901" y="883593"/>
+            <a:ext cx="8102798" cy="525661"/>
           </a:xfrm>
           <a:prstGeom prst="rect">
             <a:avLst/>
@@ -2235,6 +2314,76 @@
           <a:bodyPr wrap="square" lIns="0" tIns="0" rIns="0" bIns="0" rtlCol="0" anchor="t"/>
           <a:lstStyle/>
           <a:p>
+            <a:pPr algn="l" marL="342900" indent="-342900">
+              <a:lnSpc>
+                <a:spcPts val="1620"/>
+              </a:lnSpc>
+              <a:spcAft>
+                <a:spcPts val="300"/>
+              </a:spcAft>
+              <a:buSzPct val="100000"/>
+              <a:buChar char="•"/>
+            </a:pPr>
+            <a:r>
+              <a:rPr lang="en-US" sz="1200" dirty="0">
+                <a:solidFill>
+                  <a:srgbClr val="2C2C2C"/>
+                </a:solidFill>
+                <a:latin typeface="Verdana" pitchFamily="34" charset="0"/>
+                <a:ea typeface="Verdana" pitchFamily="34" charset="-122"/>
+                <a:cs typeface="Verdana" pitchFamily="34" charset="-120"/>
+              </a:rPr>
+              <a:t>2 children share their drawings.</a:t>
+            </a:r>
+            <a:endParaRPr lang="en-US" sz="1200" dirty="0"/>
+          </a:p>
+          <a:p>
+            <a:pPr algn="l" marL="342900" indent="-342900">
+              <a:lnSpc>
+                <a:spcPts val="1620"/>
+              </a:lnSpc>
+              <a:spcAft>
+                <a:spcPts val="300"/>
+              </a:spcAft>
+              <a:buSzPct val="100000"/>
+              <a:buChar char="•"/>
+            </a:pPr>
+            <a:r>
+              <a:rPr lang="en-US" sz="1200" dirty="0">
+                <a:solidFill>
+                  <a:srgbClr val="2C2C2C"/>
+                </a:solidFill>
+                <a:latin typeface="Verdana" pitchFamily="34" charset="0"/>
+                <a:ea typeface="Verdana" pitchFamily="34" charset="-122"/>
+                <a:cs typeface="Verdana" pitchFamily="34" charset="-120"/>
+              </a:rPr>
+              <a:t>Final chant.</a:t>
+            </a:r>
+            <a:endParaRPr lang="en-US" sz="1200" dirty="0"/>
+          </a:p>
+        </p:txBody>
+      </p:sp>
+      <p:sp>
+        <p:nvSpPr>
+          <p:cNvPr id="5" name="Text 3"/>
+          <p:cNvSpPr/>
+          <p:nvPr/>
+        </p:nvSpPr>
+        <p:spPr>
+          <a:xfrm>
+            <a:off x="406301" y="4434929"/>
+            <a:ext cx="8498026" cy="213271"/>
+          </a:xfrm>
+          <a:prstGeom prst="rect">
+            <a:avLst/>
+          </a:prstGeom>
+          <a:noFill/>
+          <a:ln/>
+        </p:spPr>
+        <p:txBody>
+          <a:bodyPr wrap="square" lIns="0" tIns="0" rIns="0" bIns="0" rtlCol="0" anchor="t"/>
+          <a:lstStyle/>
+          <a:p>
             <a:pPr algn="l" indent="0" marL="0">
               <a:lnSpc>
                 <a:spcPts val="1680"/>
@@ -2256,7 +2405,723 @@
                 <a:ea typeface="Verdana" pitchFamily="34" charset="-122"/>
                 <a:cs typeface="Verdana" pitchFamily="34" charset="-120"/>
               </a:rPr>
-              <a:t>– The drawing IS the proof. Children who see the picture once will trust the finger trick forever. – Some children will try to colour outside the lines, or count dots wrong. That's fine — the colouring is the point, the counting is the practice. – Don't introduce algebra. The dot drawing is the entire "why" for this band.</a:t>
+              <a:t>Primary ·  · IKS Curriculum</a:t>
+            </a:r>
+            <a:endParaRPr lang="en-US" sz="1200" dirty="0"/>
+          </a:p>
+        </p:txBody>
+      </p:sp>
+    </p:spTree>
+  </p:cSld>
+  <p:clrMapOvr>
+    <a:masterClrMapping/>
+  </p:clrMapOvr>
+</p:sld>
+</file>
+
+<file path=ppt/slides/slide11.xml><?xml version="1.0" encoding="utf-8"?>
+<p:sld xmlns:a="http://schemas.openxmlformats.org/drawingml/2006/main" xmlns:r="http://schemas.openxmlformats.org/officeDocument/2006/relationships" xmlns:p="http://schemas.openxmlformats.org/presentationml/2006/main">
+  <p:cSld name="Slide 11">
+    <p:bg>
+      <p:bgPr>
+        <a:solidFill>
+          <a:srgbClr val="FAF7F2"/>
+        </a:solidFill>
+      </p:bgPr>
+    </p:bg>
+    <p:spTree>
+      <p:nvGrpSpPr>
+        <p:cNvPr id="1" name=""/>
+        <p:cNvGrpSpPr/>
+        <p:nvPr/>
+      </p:nvGrpSpPr>
+      <p:grpSpPr>
+        <a:xfrm>
+          <a:off x="0" y="0"/>
+          <a:ext cx="0" cy="0"/>
+          <a:chOff x="0" y="0"/>
+          <a:chExt cx="0" cy="0"/>
+        </a:xfrm>
+      </p:grpSpPr>
+      <p:sp>
+        <p:nvSpPr>
+          <p:cNvPr id="2" name="Text 0"/>
+          <p:cNvSpPr/>
+          <p:nvPr/>
+        </p:nvSpPr>
+        <p:spPr>
+          <a:xfrm>
+            <a:off x="0" y="0"/>
+            <a:ext cx="9144000" cy="101501"/>
+          </a:xfrm>
+          <a:prstGeom prst="rect">
+            <a:avLst/>
+          </a:prstGeom>
+          <a:solidFill>
+            <a:srgbClr val="87A96B"/>
+          </a:solidFill>
+          <a:ln/>
+        </p:spPr>
+        <p:txBody>
+          <a:bodyPr wrap="square" rtlCol="0" anchor="ctr"/>
+          <a:lstStyle/>
+          <a:p>
+            <a:pPr indent="0" marL="0">
+              <a:buNone/>
+            </a:pPr>
+            <a:endParaRPr lang="en-US" dirty="0"/>
+          </a:p>
+        </p:txBody>
+      </p:sp>
+      <p:sp>
+        <p:nvSpPr>
+          <p:cNvPr id="3" name="Text 1"/>
+          <p:cNvSpPr/>
+          <p:nvPr/>
+        </p:nvSpPr>
+        <p:spPr>
+          <a:xfrm>
+            <a:off x="406301" y="457051"/>
+            <a:ext cx="8498026" cy="274290"/>
+          </a:xfrm>
+          <a:prstGeom prst="rect">
+            <a:avLst/>
+          </a:prstGeom>
+          <a:noFill/>
+          <a:ln/>
+        </p:spPr>
+        <p:txBody>
+          <a:bodyPr wrap="square" lIns="0" tIns="0" rIns="0" bIns="0" rtlCol="0" anchor="t"/>
+          <a:lstStyle/>
+          <a:p>
+            <a:pPr algn="l" indent="0" marL="0">
+              <a:lnSpc>
+                <a:spcPts val="2160"/>
+              </a:lnSpc>
+              <a:spcBef>
+                <a:spcPts val="600"/>
+              </a:spcBef>
+              <a:spcAft>
+                <a:spcPts val="800"/>
+              </a:spcAft>
+              <a:buNone/>
+            </a:pPr>
+            <a:r>
+              <a:rPr lang="en-US" sz="1800" b="1" dirty="0">
+                <a:solidFill>
+                  <a:srgbClr val="E07A5F"/>
+                </a:solidFill>
+                <a:latin typeface="Georgia" pitchFamily="34" charset="0"/>
+                <a:ea typeface="Georgia" pitchFamily="34" charset="-122"/>
+                <a:cs typeface="Georgia" pitchFamily="34" charset="-120"/>
+              </a:rPr>
+              <a:t>Homework</a:t>
+            </a:r>
+            <a:endParaRPr lang="en-US" sz="1800" dirty="0"/>
+          </a:p>
+        </p:txBody>
+      </p:sp>
+      <p:sp>
+        <p:nvSpPr>
+          <p:cNvPr id="4" name="Text 2"/>
+          <p:cNvSpPr/>
+          <p:nvPr/>
+        </p:nvSpPr>
+        <p:spPr>
+          <a:xfrm>
+            <a:off x="634901" y="883593"/>
+            <a:ext cx="8102798" cy="487561"/>
+          </a:xfrm>
+          <a:prstGeom prst="rect">
+            <a:avLst/>
+          </a:prstGeom>
+          <a:noFill/>
+          <a:ln/>
+        </p:spPr>
+        <p:txBody>
+          <a:bodyPr wrap="square" lIns="0" tIns="0" rIns="0" bIns="0" rtlCol="0" anchor="t"/>
+          <a:lstStyle/>
+          <a:p>
+            <a:pPr algn="l" marL="342900" indent="-342900">
+              <a:lnSpc>
+                <a:spcPts val="1620"/>
+              </a:lnSpc>
+              <a:spcAft>
+                <a:spcPts val="300"/>
+              </a:spcAft>
+              <a:buSzPct val="100000"/>
+              <a:buChar char="•"/>
+            </a:pPr>
+            <a:r>
+              <a:rPr lang="en-US" sz="1200" dirty="0">
+                <a:solidFill>
+                  <a:srgbClr val="2C2C2C"/>
+                </a:solidFill>
+                <a:latin typeface="Verdana" pitchFamily="34" charset="0"/>
+                <a:ea typeface="Verdana" pitchFamily="34" charset="-122"/>
+                <a:cs typeface="Verdana" pitchFamily="34" charset="-120"/>
+              </a:rPr>
+              <a:t>Pick another problem (6 × 7 OR 9 × 8) and draw the dot rectangle. Colour the corners. Bring it tomorrow.</a:t>
+            </a:r>
+            <a:endParaRPr lang="en-US" sz="1200" dirty="0"/>
+          </a:p>
+        </p:txBody>
+      </p:sp>
+      <p:sp>
+        <p:nvSpPr>
+          <p:cNvPr id="5" name="Text 3"/>
+          <p:cNvSpPr/>
+          <p:nvPr/>
+        </p:nvSpPr>
+        <p:spPr>
+          <a:xfrm>
+            <a:off x="406301" y="4434929"/>
+            <a:ext cx="8498026" cy="213271"/>
+          </a:xfrm>
+          <a:prstGeom prst="rect">
+            <a:avLst/>
+          </a:prstGeom>
+          <a:noFill/>
+          <a:ln/>
+        </p:spPr>
+        <p:txBody>
+          <a:bodyPr wrap="square" lIns="0" tIns="0" rIns="0" bIns="0" rtlCol="0" anchor="t"/>
+          <a:lstStyle/>
+          <a:p>
+            <a:pPr algn="l" indent="0" marL="0">
+              <a:lnSpc>
+                <a:spcPts val="1680"/>
+              </a:lnSpc>
+              <a:spcBef>
+                <a:spcPts val="300"/>
+              </a:spcBef>
+              <a:spcAft>
+                <a:spcPts val="300"/>
+              </a:spcAft>
+              <a:buNone/>
+            </a:pPr>
+            <a:r>
+              <a:rPr lang="en-US" sz="1200" dirty="0">
+                <a:solidFill>
+                  <a:srgbClr val="2C2C2C"/>
+                </a:solidFill>
+                <a:latin typeface="Verdana" pitchFamily="34" charset="0"/>
+                <a:ea typeface="Verdana" pitchFamily="34" charset="-122"/>
+                <a:cs typeface="Verdana" pitchFamily="34" charset="-120"/>
+              </a:rPr>
+              <a:t>Primary ·  · IKS Curriculum</a:t>
+            </a:r>
+            <a:endParaRPr lang="en-US" sz="1200" dirty="0"/>
+          </a:p>
+        </p:txBody>
+      </p:sp>
+    </p:spTree>
+  </p:cSld>
+  <p:clrMapOvr>
+    <a:masterClrMapping/>
+  </p:clrMapOvr>
+</p:sld>
+</file>
+
+<file path=ppt/slides/slide12.xml><?xml version="1.0" encoding="utf-8"?>
+<p:sld xmlns:a="http://schemas.openxmlformats.org/drawingml/2006/main" xmlns:r="http://schemas.openxmlformats.org/officeDocument/2006/relationships" xmlns:p="http://schemas.openxmlformats.org/presentationml/2006/main">
+  <p:cSld name="Slide 12">
+    <p:bg>
+      <p:bgPr>
+        <a:solidFill>
+          <a:srgbClr val="FAF7F2"/>
+        </a:solidFill>
+      </p:bgPr>
+    </p:bg>
+    <p:spTree>
+      <p:nvGrpSpPr>
+        <p:cNvPr id="1" name=""/>
+        <p:cNvGrpSpPr/>
+        <p:nvPr/>
+      </p:nvGrpSpPr>
+      <p:grpSpPr>
+        <a:xfrm>
+          <a:off x="0" y="0"/>
+          <a:ext cx="0" cy="0"/>
+          <a:chOff x="0" y="0"/>
+          <a:chExt cx="0" cy="0"/>
+        </a:xfrm>
+      </p:grpSpPr>
+      <p:sp>
+        <p:nvSpPr>
+          <p:cNvPr id="2" name="Text 0"/>
+          <p:cNvSpPr/>
+          <p:nvPr/>
+        </p:nvSpPr>
+        <p:spPr>
+          <a:xfrm>
+            <a:off x="0" y="0"/>
+            <a:ext cx="9144000" cy="101501"/>
+          </a:xfrm>
+          <a:prstGeom prst="rect">
+            <a:avLst/>
+          </a:prstGeom>
+          <a:solidFill>
+            <a:srgbClr val="87A96B"/>
+          </a:solidFill>
+          <a:ln/>
+        </p:spPr>
+        <p:txBody>
+          <a:bodyPr wrap="square" rtlCol="0" anchor="ctr"/>
+          <a:lstStyle/>
+          <a:p>
+            <a:pPr indent="0" marL="0">
+              <a:buNone/>
+            </a:pPr>
+            <a:endParaRPr lang="en-US" dirty="0"/>
+          </a:p>
+        </p:txBody>
+      </p:sp>
+      <p:sp>
+        <p:nvSpPr>
+          <p:cNvPr id="3" name="Text 1"/>
+          <p:cNvSpPr/>
+          <p:nvPr/>
+        </p:nvSpPr>
+        <p:spPr>
+          <a:xfrm>
+            <a:off x="406301" y="457051"/>
+            <a:ext cx="8498026" cy="274290"/>
+          </a:xfrm>
+          <a:prstGeom prst="rect">
+            <a:avLst/>
+          </a:prstGeom>
+          <a:noFill/>
+          <a:ln/>
+        </p:spPr>
+        <p:txBody>
+          <a:bodyPr wrap="square" lIns="0" tIns="0" rIns="0" bIns="0" rtlCol="0" anchor="t"/>
+          <a:lstStyle/>
+          <a:p>
+            <a:pPr algn="l" indent="0" marL="0">
+              <a:lnSpc>
+                <a:spcPts val="2160"/>
+              </a:lnSpc>
+              <a:spcBef>
+                <a:spcPts val="600"/>
+              </a:spcBef>
+              <a:spcAft>
+                <a:spcPts val="800"/>
+              </a:spcAft>
+              <a:buNone/>
+            </a:pPr>
+            <a:r>
+              <a:rPr lang="en-US" sz="1800" b="1" dirty="0">
+                <a:solidFill>
+                  <a:srgbClr val="E07A5F"/>
+                </a:solidFill>
+                <a:latin typeface="Georgia" pitchFamily="34" charset="0"/>
+                <a:ea typeface="Georgia" pitchFamily="34" charset="-122"/>
+                <a:cs typeface="Georgia" pitchFamily="34" charset="-120"/>
+              </a:rPr>
+              <a:t>Differentiation</a:t>
+            </a:r>
+            <a:endParaRPr lang="en-US" sz="1800" dirty="0"/>
+          </a:p>
+        </p:txBody>
+      </p:sp>
+      <p:sp>
+        <p:nvSpPr>
+          <p:cNvPr id="4" name="Text 2"/>
+          <p:cNvSpPr/>
+          <p:nvPr/>
+        </p:nvSpPr>
+        <p:spPr>
+          <a:xfrm>
+            <a:off x="634901" y="883593"/>
+            <a:ext cx="8102798" cy="759916"/>
+          </a:xfrm>
+          <a:prstGeom prst="rect">
+            <a:avLst/>
+          </a:prstGeom>
+          <a:noFill/>
+          <a:ln/>
+        </p:spPr>
+        <p:txBody>
+          <a:bodyPr wrap="square" lIns="0" tIns="0" rIns="0" bIns="0" rtlCol="0" anchor="t"/>
+          <a:lstStyle/>
+          <a:p>
+            <a:pPr algn="l" marL="342900" indent="-342900">
+              <a:lnSpc>
+                <a:spcPts val="1620"/>
+              </a:lnSpc>
+              <a:spcAft>
+                <a:spcPts val="300"/>
+              </a:spcAft>
+              <a:buSzPct val="100000"/>
+              <a:buChar char="•"/>
+            </a:pPr>
+            <a:r>
+              <a:rPr lang="en-US" sz="1200" b="1" dirty="0">
+                <a:solidFill>
+                  <a:srgbClr val="2C2C2C"/>
+                </a:solidFill>
+                <a:latin typeface="Verdana" pitchFamily="34" charset="0"/>
+                <a:ea typeface="Verdana" pitchFamily="34" charset="-122"/>
+                <a:cs typeface="Verdana" pitchFamily="34" charset="-120"/>
+              </a:rPr>
+              <a:t>Tier up:</a:t>
+            </a:r>
+            <a:pPr algn="l" indent="0" marL="0">
+              <a:lnSpc>
+                <a:spcPts val="1620"/>
+              </a:lnSpc>
+              <a:spcAft>
+                <a:spcPts val="300"/>
+              </a:spcAft>
+              <a:buNone/>
+            </a:pPr>
+            <a:r>
+              <a:rPr lang="en-US" sz="1200" dirty="0">
+                <a:solidFill>
+                  <a:srgbClr val="2C2C2C"/>
+                </a:solidFill>
+                <a:latin typeface="Verdana" pitchFamily="34" charset="0"/>
+                <a:ea typeface="Verdana" pitchFamily="34" charset="-122"/>
+                <a:cs typeface="Verdana" pitchFamily="34" charset="-120"/>
+              </a:rPr>
+              <a:t> Draw the same picture for </a:t>
+            </a:r>
+            <a:pPr algn="l" indent="0" marL="0">
+              <a:lnSpc>
+                <a:spcPts val="1620"/>
+              </a:lnSpc>
+              <a:spcAft>
+                <a:spcPts val="300"/>
+              </a:spcAft>
+              <a:buNone/>
+            </a:pPr>
+            <a:r>
+              <a:rPr lang="en-US" sz="1200" dirty="0">
+                <a:solidFill>
+                  <a:srgbClr val="2C2C2C"/>
+                </a:solidFill>
+                <a:latin typeface="Verdana" pitchFamily="34" charset="0"/>
+                <a:ea typeface="Verdana" pitchFamily="34" charset="-122"/>
+                <a:cs typeface="Verdana" pitchFamily="34" charset="-120"/>
+              </a:rPr>
+              <a:t>9 × 9</a:t>
+            </a:r>
+            <a:pPr algn="l" indent="0" marL="0">
+              <a:lnSpc>
+                <a:spcPts val="1620"/>
+              </a:lnSpc>
+              <a:spcAft>
+                <a:spcPts val="300"/>
+              </a:spcAft>
+              <a:buNone/>
+            </a:pPr>
+            <a:r>
+              <a:rPr lang="en-US" sz="1200" dirty="0">
+                <a:solidFill>
+                  <a:srgbClr val="2C2C2C"/>
+                </a:solidFill>
+                <a:latin typeface="Verdana" pitchFamily="34" charset="0"/>
+                <a:ea typeface="Verdana" pitchFamily="34" charset="-122"/>
+                <a:cs typeface="Verdana" pitchFamily="34" charset="-120"/>
+              </a:rPr>
+              <a:t>. The corner is 1 × 1 = 1 dot. The rest is 80 dots. Total = 81. ✓</a:t>
+            </a:r>
+            <a:endParaRPr lang="en-US" sz="1200" dirty="0"/>
+          </a:p>
+          <a:p>
+            <a:pPr algn="l" marL="342900" indent="-342900">
+              <a:lnSpc>
+                <a:spcPts val="1620"/>
+              </a:lnSpc>
+              <a:spcAft>
+                <a:spcPts val="300"/>
+              </a:spcAft>
+              <a:buSzPct val="100000"/>
+              <a:buChar char="•"/>
+            </a:pPr>
+            <a:r>
+              <a:rPr lang="en-US" sz="1200" b="1" dirty="0">
+                <a:solidFill>
+                  <a:srgbClr val="2C2C2C"/>
+                </a:solidFill>
+                <a:latin typeface="Verdana" pitchFamily="34" charset="0"/>
+                <a:ea typeface="Verdana" pitchFamily="34" charset="-122"/>
+                <a:cs typeface="Verdana" pitchFamily="34" charset="-120"/>
+              </a:rPr>
+              <a:t>Tier down:</a:t>
+            </a:r>
+            <a:pPr algn="l" indent="0" marL="0">
+              <a:lnSpc>
+                <a:spcPts val="1620"/>
+              </a:lnSpc>
+              <a:spcAft>
+                <a:spcPts val="300"/>
+              </a:spcAft>
+              <a:buNone/>
+            </a:pPr>
+            <a:r>
+              <a:rPr lang="en-US" sz="1200" dirty="0">
+                <a:solidFill>
+                  <a:srgbClr val="2C2C2C"/>
+                </a:solidFill>
+                <a:latin typeface="Verdana" pitchFamily="34" charset="0"/>
+                <a:ea typeface="Verdana" pitchFamily="34" charset="-122"/>
+                <a:cs typeface="Verdana" pitchFamily="34" charset="-120"/>
+              </a:rPr>
+              <a:t> Pre-printed grid; child just colours the regions.</a:t>
+            </a:r>
+            <a:endParaRPr lang="en-US" sz="1200" dirty="0"/>
+          </a:p>
+        </p:txBody>
+      </p:sp>
+      <p:sp>
+        <p:nvSpPr>
+          <p:cNvPr id="5" name="Text 3"/>
+          <p:cNvSpPr/>
+          <p:nvPr/>
+        </p:nvSpPr>
+        <p:spPr>
+          <a:xfrm>
+            <a:off x="406301" y="4434929"/>
+            <a:ext cx="8498026" cy="213271"/>
+          </a:xfrm>
+          <a:prstGeom prst="rect">
+            <a:avLst/>
+          </a:prstGeom>
+          <a:noFill/>
+          <a:ln/>
+        </p:spPr>
+        <p:txBody>
+          <a:bodyPr wrap="square" lIns="0" tIns="0" rIns="0" bIns="0" rtlCol="0" anchor="t"/>
+          <a:lstStyle/>
+          <a:p>
+            <a:pPr algn="l" indent="0" marL="0">
+              <a:lnSpc>
+                <a:spcPts val="1680"/>
+              </a:lnSpc>
+              <a:spcBef>
+                <a:spcPts val="300"/>
+              </a:spcBef>
+              <a:spcAft>
+                <a:spcPts val="300"/>
+              </a:spcAft>
+              <a:buNone/>
+            </a:pPr>
+            <a:r>
+              <a:rPr lang="en-US" sz="1200" dirty="0">
+                <a:solidFill>
+                  <a:srgbClr val="2C2C2C"/>
+                </a:solidFill>
+                <a:latin typeface="Verdana" pitchFamily="34" charset="0"/>
+                <a:ea typeface="Verdana" pitchFamily="34" charset="-122"/>
+                <a:cs typeface="Verdana" pitchFamily="34" charset="-120"/>
+              </a:rPr>
+              <a:t>Primary ·  · IKS Curriculum</a:t>
+            </a:r>
+            <a:endParaRPr lang="en-US" sz="1200" dirty="0"/>
+          </a:p>
+        </p:txBody>
+      </p:sp>
+    </p:spTree>
+  </p:cSld>
+  <p:clrMapOvr>
+    <a:masterClrMapping/>
+  </p:clrMapOvr>
+</p:sld>
+</file>
+
+<file path=ppt/slides/slide13.xml><?xml version="1.0" encoding="utf-8"?>
+<p:sld xmlns:a="http://schemas.openxmlformats.org/drawingml/2006/main" xmlns:r="http://schemas.openxmlformats.org/officeDocument/2006/relationships" xmlns:p="http://schemas.openxmlformats.org/presentationml/2006/main">
+  <p:cSld name="Slide 13">
+    <p:bg>
+      <p:bgPr>
+        <a:solidFill>
+          <a:srgbClr val="FAF7F2"/>
+        </a:solidFill>
+      </p:bgPr>
+    </p:bg>
+    <p:spTree>
+      <p:nvGrpSpPr>
+        <p:cNvPr id="1" name=""/>
+        <p:cNvGrpSpPr/>
+        <p:nvPr/>
+      </p:nvGrpSpPr>
+      <p:grpSpPr>
+        <a:xfrm>
+          <a:off x="0" y="0"/>
+          <a:ext cx="0" cy="0"/>
+          <a:chOff x="0" y="0"/>
+          <a:chExt cx="0" cy="0"/>
+        </a:xfrm>
+      </p:grpSpPr>
+      <p:sp>
+        <p:nvSpPr>
+          <p:cNvPr id="2" name="Text 0"/>
+          <p:cNvSpPr/>
+          <p:nvPr/>
+        </p:nvSpPr>
+        <p:spPr>
+          <a:xfrm>
+            <a:off x="0" y="0"/>
+            <a:ext cx="9144000" cy="101501"/>
+          </a:xfrm>
+          <a:prstGeom prst="rect">
+            <a:avLst/>
+          </a:prstGeom>
+          <a:solidFill>
+            <a:srgbClr val="87A96B"/>
+          </a:solidFill>
+          <a:ln/>
+        </p:spPr>
+        <p:txBody>
+          <a:bodyPr wrap="square" rtlCol="0" anchor="ctr"/>
+          <a:lstStyle/>
+          <a:p>
+            <a:pPr indent="0" marL="0">
+              <a:buNone/>
+            </a:pPr>
+            <a:endParaRPr lang="en-US" dirty="0"/>
+          </a:p>
+        </p:txBody>
+      </p:sp>
+      <p:sp>
+        <p:nvSpPr>
+          <p:cNvPr id="3" name="Text 1"/>
+          <p:cNvSpPr/>
+          <p:nvPr/>
+        </p:nvSpPr>
+        <p:spPr>
+          <a:xfrm>
+            <a:off x="406301" y="457051"/>
+            <a:ext cx="8498026" cy="274290"/>
+          </a:xfrm>
+          <a:prstGeom prst="rect">
+            <a:avLst/>
+          </a:prstGeom>
+          <a:noFill/>
+          <a:ln/>
+        </p:spPr>
+        <p:txBody>
+          <a:bodyPr wrap="square" lIns="0" tIns="0" rIns="0" bIns="0" rtlCol="0" anchor="t"/>
+          <a:lstStyle/>
+          <a:p>
+            <a:pPr algn="l" indent="0" marL="0">
+              <a:lnSpc>
+                <a:spcPts val="2160"/>
+              </a:lnSpc>
+              <a:spcBef>
+                <a:spcPts val="600"/>
+              </a:spcBef>
+              <a:spcAft>
+                <a:spcPts val="800"/>
+              </a:spcAft>
+              <a:buNone/>
+            </a:pPr>
+            <a:r>
+              <a:rPr lang="en-US" sz="1800" b="1" dirty="0">
+                <a:solidFill>
+                  <a:srgbClr val="E07A5F"/>
+                </a:solidFill>
+                <a:latin typeface="Georgia" pitchFamily="34" charset="0"/>
+                <a:ea typeface="Georgia" pitchFamily="34" charset="-122"/>
+                <a:cs typeface="Georgia" pitchFamily="34" charset="-120"/>
+              </a:rPr>
+              <a:t>Teacher's quick notes</a:t>
+            </a:r>
+            <a:endParaRPr lang="en-US" sz="1800" dirty="0"/>
+          </a:p>
+        </p:txBody>
+      </p:sp>
+      <p:sp>
+        <p:nvSpPr>
+          <p:cNvPr id="4" name="Text 2"/>
+          <p:cNvSpPr/>
+          <p:nvPr/>
+        </p:nvSpPr>
+        <p:spPr>
+          <a:xfrm>
+            <a:off x="634901" y="883593"/>
+            <a:ext cx="8102798" cy="975122"/>
+          </a:xfrm>
+          <a:prstGeom prst="rect">
+            <a:avLst/>
+          </a:prstGeom>
+          <a:noFill/>
+          <a:ln/>
+        </p:spPr>
+        <p:txBody>
+          <a:bodyPr wrap="square" lIns="0" tIns="0" rIns="0" bIns="0" rtlCol="0" anchor="t"/>
+          <a:lstStyle/>
+          <a:p>
+            <a:pPr algn="l" marL="342900" indent="-342900">
+              <a:lnSpc>
+                <a:spcPts val="1620"/>
+              </a:lnSpc>
+              <a:spcAft>
+                <a:spcPts val="300"/>
+              </a:spcAft>
+              <a:buSzPct val="100000"/>
+              <a:buChar char="•"/>
+            </a:pPr>
+            <a:r>
+              <a:rPr lang="en-US" sz="1200" dirty="0">
+                <a:solidFill>
+                  <a:srgbClr val="2C2C2C"/>
+                </a:solidFill>
+                <a:latin typeface="Verdana" pitchFamily="34" charset="0"/>
+                <a:ea typeface="Verdana" pitchFamily="34" charset="-122"/>
+                <a:cs typeface="Verdana" pitchFamily="34" charset="-120"/>
+              </a:rPr>
+              <a:t>The drawing IS the proof. Children who see the picture once will trust the finger trick forever.</a:t>
+            </a:r>
+            <a:endParaRPr lang="en-US" sz="1200" dirty="0"/>
+          </a:p>
+          <a:p>
+            <a:pPr algn="l" marL="342900" indent="-342900">
+              <a:lnSpc>
+                <a:spcPts val="1620"/>
+              </a:lnSpc>
+              <a:spcAft>
+                <a:spcPts val="300"/>
+              </a:spcAft>
+              <a:buSzPct val="100000"/>
+              <a:buChar char="•"/>
+            </a:pPr>
+            <a:r>
+              <a:rPr lang="en-US" sz="1200" dirty="0">
+                <a:solidFill>
+                  <a:srgbClr val="2C2C2C"/>
+                </a:solidFill>
+                <a:latin typeface="Verdana" pitchFamily="34" charset="0"/>
+                <a:ea typeface="Verdana" pitchFamily="34" charset="-122"/>
+                <a:cs typeface="Verdana" pitchFamily="34" charset="-120"/>
+              </a:rPr>
+              <a:t>Some children will try to colour outside the lines, or count dots wrong. That's fine — the colouring is the point, the counting is the practice.</a:t>
+            </a:r>
+            <a:endParaRPr lang="en-US" sz="1200" dirty="0"/>
+          </a:p>
+          <a:p>
+            <a:pPr algn="l" marL="342900" indent="-342900">
+              <a:lnSpc>
+                <a:spcPts val="1620"/>
+              </a:lnSpc>
+              <a:spcAft>
+                <a:spcPts val="300"/>
+              </a:spcAft>
+              <a:buSzPct val="100000"/>
+              <a:buChar char="•"/>
+            </a:pPr>
+            <a:r>
+              <a:rPr lang="en-US" sz="1200" dirty="0">
+                <a:solidFill>
+                  <a:srgbClr val="2C2C2C"/>
+                </a:solidFill>
+                <a:latin typeface="Verdana" pitchFamily="34" charset="0"/>
+                <a:ea typeface="Verdana" pitchFamily="34" charset="-122"/>
+                <a:cs typeface="Verdana" pitchFamily="34" charset="-120"/>
+              </a:rPr>
+              <a:t>Don't introduce algebra. The dot drawing is the entire "why" for this band.</a:t>
             </a:r>
             <a:endParaRPr lang="en-US" sz="1200" dirty="0"/>
           </a:p>
@@ -2414,7 +3279,7 @@
                 <a:ea typeface="Georgia" pitchFamily="34" charset="-122"/>
                 <a:cs typeface="Georgia" pitchFamily="34" charset="-120"/>
               </a:rPr>
-              <a:t>Materials</a:t>
+              <a:t>Goal</a:t>
             </a:r>
             <a:endParaRPr lang="en-US" sz="1800" dirty="0"/>
           </a:p>
@@ -2429,7 +3294,7 @@
         <p:spPr>
           <a:xfrm>
             <a:off x="406301" y="870942"/>
-            <a:ext cx="8498026" cy="426541"/>
+            <a:ext cx="8498026" cy="445591"/>
           </a:xfrm>
           <a:prstGeom prst="rect">
             <a:avLst/>
@@ -2462,7 +3327,99 @@
                 <a:ea typeface="Verdana" pitchFamily="34" charset="-122"/>
                 <a:cs typeface="Verdana" pitchFamily="34" charset="-120"/>
               </a:rPr>
-              <a:t>– A4 paper per child (or larger). – Coloured crayons / pencils (2 colours per child works fine). – The hand poster from Day 3.</a:t>
+              <a:t>Children draw a dot pattern showing why </a:t>
+            </a:r>
+            <a:pPr algn="l" indent="0" marL="0">
+              <a:lnSpc>
+                <a:spcPts val="1680"/>
+              </a:lnSpc>
+              <a:spcBef>
+                <a:spcPts val="300"/>
+              </a:spcBef>
+              <a:spcAft>
+                <a:spcPts val="300"/>
+              </a:spcAft>
+              <a:buNone/>
+            </a:pPr>
+            <a:r>
+              <a:rPr lang="en-US" sz="1200" dirty="0">
+                <a:solidFill>
+                  <a:srgbClr val="2C2C2C"/>
+                </a:solidFill>
+                <a:latin typeface="Verdana" pitchFamily="34" charset="0"/>
+                <a:ea typeface="Verdana" pitchFamily="34" charset="-122"/>
+                <a:cs typeface="Verdana" pitchFamily="34" charset="-120"/>
+              </a:rPr>
+              <a:t>7 × 8 = 56</a:t>
+            </a:r>
+            <a:pPr algn="l" indent="0" marL="0">
+              <a:lnSpc>
+                <a:spcPts val="1680"/>
+              </a:lnSpc>
+              <a:spcBef>
+                <a:spcPts val="300"/>
+              </a:spcBef>
+              <a:spcAft>
+                <a:spcPts val="300"/>
+              </a:spcAft>
+              <a:buNone/>
+            </a:pPr>
+            <a:r>
+              <a:rPr lang="en-US" sz="1200" dirty="0">
+                <a:solidFill>
+                  <a:srgbClr val="2C2C2C"/>
+                </a:solidFill>
+                <a:latin typeface="Verdana" pitchFamily="34" charset="0"/>
+                <a:ea typeface="Verdana" pitchFamily="34" charset="-122"/>
+                <a:cs typeface="Verdana" pitchFamily="34" charset="-120"/>
+              </a:rPr>
+              <a:t> and </a:t>
+            </a:r>
+            <a:pPr algn="l" indent="0" marL="0">
+              <a:lnSpc>
+                <a:spcPts val="1680"/>
+              </a:lnSpc>
+              <a:spcBef>
+                <a:spcPts val="300"/>
+              </a:spcBef>
+              <a:spcAft>
+                <a:spcPts val="300"/>
+              </a:spcAft>
+              <a:buNone/>
+            </a:pPr>
+            <a:r>
+              <a:rPr lang="en-US" sz="1200" i="1" dirty="0">
+                <a:solidFill>
+                  <a:srgbClr val="2C2C2C"/>
+                </a:solidFill>
+                <a:latin typeface="Verdana" pitchFamily="34" charset="0"/>
+                <a:ea typeface="Verdana" pitchFamily="34" charset="-122"/>
+                <a:cs typeface="Verdana" pitchFamily="34" charset="-120"/>
+              </a:rPr>
+              <a:t>see</a:t>
+            </a:r>
+            <a:pPr algn="l" indent="0" marL="0">
+              <a:lnSpc>
+                <a:spcPts val="1680"/>
+              </a:lnSpc>
+              <a:spcBef>
+                <a:spcPts val="300"/>
+              </a:spcBef>
+              <a:spcAft>
+                <a:spcPts val="300"/>
+              </a:spcAft>
+              <a:buNone/>
+            </a:pPr>
+            <a:r>
+              <a:rPr lang="en-US" sz="1200" dirty="0">
+                <a:solidFill>
+                  <a:srgbClr val="2C2C2C"/>
+                </a:solidFill>
+                <a:latin typeface="Verdana" pitchFamily="34" charset="0"/>
+                <a:ea typeface="Verdana" pitchFamily="34" charset="-122"/>
+                <a:cs typeface="Verdana" pitchFamily="34" charset="-120"/>
+              </a:rPr>
+              <a:t> the connection between fingers and the answer.</a:t>
             </a:r>
             <a:endParaRPr lang="en-US" sz="1200" dirty="0"/>
           </a:p>
@@ -2620,7 +3577,7 @@
                 <a:ea typeface="Georgia" pitchFamily="34" charset="-122"/>
                 <a:cs typeface="Georgia" pitchFamily="34" charset="-120"/>
               </a:rPr>
-              <a:t>The flow</a:t>
+              <a:t>Materials</a:t>
             </a:r>
             <a:endParaRPr lang="en-US" sz="1800" dirty="0"/>
           </a:p>
@@ -2629,6 +3586,100 @@
       <p:sp>
         <p:nvSpPr>
           <p:cNvPr id="4" name="Text 2"/>
+          <p:cNvSpPr/>
+          <p:nvPr/>
+        </p:nvSpPr>
+        <p:spPr>
+          <a:xfrm>
+            <a:off x="634901" y="883593"/>
+            <a:ext cx="8102798" cy="769441"/>
+          </a:xfrm>
+          <a:prstGeom prst="rect">
+            <a:avLst/>
+          </a:prstGeom>
+          <a:noFill/>
+          <a:ln/>
+        </p:spPr>
+        <p:txBody>
+          <a:bodyPr wrap="square" lIns="0" tIns="0" rIns="0" bIns="0" rtlCol="0" anchor="t"/>
+          <a:lstStyle/>
+          <a:p>
+            <a:pPr algn="l" marL="342900" indent="-342900">
+              <a:lnSpc>
+                <a:spcPts val="1620"/>
+              </a:lnSpc>
+              <a:spcAft>
+                <a:spcPts val="300"/>
+              </a:spcAft>
+              <a:buSzPct val="100000"/>
+              <a:buChar char="•"/>
+            </a:pPr>
+            <a:r>
+              <a:rPr lang="en-US" sz="1200" dirty="0">
+                <a:solidFill>
+                  <a:srgbClr val="2C2C2C"/>
+                </a:solidFill>
+                <a:latin typeface="Verdana" pitchFamily="34" charset="0"/>
+                <a:ea typeface="Verdana" pitchFamily="34" charset="-122"/>
+                <a:cs typeface="Verdana" pitchFamily="34" charset="-120"/>
+              </a:rPr>
+              <a:t>A4 paper per child (or larger).</a:t>
+            </a:r>
+            <a:endParaRPr lang="en-US" sz="1200" dirty="0"/>
+          </a:p>
+          <a:p>
+            <a:pPr algn="l" marL="342900" indent="-342900">
+              <a:lnSpc>
+                <a:spcPts val="1620"/>
+              </a:lnSpc>
+              <a:spcAft>
+                <a:spcPts val="300"/>
+              </a:spcAft>
+              <a:buSzPct val="100000"/>
+              <a:buChar char="•"/>
+            </a:pPr>
+            <a:r>
+              <a:rPr lang="en-US" sz="1200" dirty="0">
+                <a:solidFill>
+                  <a:srgbClr val="2C2C2C"/>
+                </a:solidFill>
+                <a:latin typeface="Verdana" pitchFamily="34" charset="0"/>
+                <a:ea typeface="Verdana" pitchFamily="34" charset="-122"/>
+                <a:cs typeface="Verdana" pitchFamily="34" charset="-120"/>
+              </a:rPr>
+              <a:t>Coloured crayons / pencils (2 colours per child works fine).</a:t>
+            </a:r>
+            <a:endParaRPr lang="en-US" sz="1200" dirty="0"/>
+          </a:p>
+          <a:p>
+            <a:pPr algn="l" marL="342900" indent="-342900">
+              <a:lnSpc>
+                <a:spcPts val="1620"/>
+              </a:lnSpc>
+              <a:spcAft>
+                <a:spcPts val="300"/>
+              </a:spcAft>
+              <a:buSzPct val="100000"/>
+              <a:buChar char="•"/>
+            </a:pPr>
+            <a:r>
+              <a:rPr lang="en-US" sz="1200" dirty="0">
+                <a:solidFill>
+                  <a:srgbClr val="2C2C2C"/>
+                </a:solidFill>
+                <a:latin typeface="Verdana" pitchFamily="34" charset="0"/>
+                <a:ea typeface="Verdana" pitchFamily="34" charset="-122"/>
+                <a:cs typeface="Verdana" pitchFamily="34" charset="-120"/>
+              </a:rPr>
+              <a:t>The hand poster from Day 3.</a:t>
+            </a:r>
+            <a:endParaRPr lang="en-US" sz="1200" dirty="0"/>
+          </a:p>
+        </p:txBody>
+      </p:sp>
+      <p:sp>
+        <p:nvSpPr>
+          <p:cNvPr id="5" name="Text 3"/>
           <p:cNvSpPr/>
           <p:nvPr/>
         </p:nvSpPr>
@@ -2778,7 +3829,7 @@
                 <a:ea typeface="Georgia" pitchFamily="34" charset="-122"/>
                 <a:cs typeface="Georgia" pitchFamily="34" charset="-120"/>
               </a:rPr>
-              <a:t>Settle + chant (3 min)</a:t>
+              <a:t>The flow</a:t>
             </a:r>
             <a:endParaRPr lang="en-US" sz="1800" dirty="0"/>
           </a:p>
@@ -2787,54 +3838,6 @@
       <p:sp>
         <p:nvSpPr>
           <p:cNvPr id="4" name="Text 2"/>
-          <p:cNvSpPr/>
-          <p:nvPr/>
-        </p:nvSpPr>
-        <p:spPr>
-          <a:xfrm>
-            <a:off x="406301" y="870942"/>
-            <a:ext cx="8498026" cy="213271"/>
-          </a:xfrm>
-          <a:prstGeom prst="rect">
-            <a:avLst/>
-          </a:prstGeom>
-          <a:noFill/>
-          <a:ln/>
-        </p:spPr>
-        <p:txBody>
-          <a:bodyPr wrap="square" lIns="0" tIns="0" rIns="0" bIns="0" rtlCol="0" anchor="t"/>
-          <a:lstStyle/>
-          <a:p>
-            <a:pPr algn="l" indent="0" marL="0">
-              <a:lnSpc>
-                <a:spcPts val="1680"/>
-              </a:lnSpc>
-              <a:spcBef>
-                <a:spcPts val="300"/>
-              </a:spcBef>
-              <a:spcAft>
-                <a:spcPts val="300"/>
-              </a:spcAft>
-              <a:buNone/>
-            </a:pPr>
-            <a:r>
-              <a:rPr lang="en-US" sz="1200" dirty="0">
-                <a:solidFill>
-                  <a:srgbClr val="2C2C2C"/>
-                </a:solidFill>
-                <a:latin typeface="Verdana" pitchFamily="34" charset="0"/>
-                <a:ea typeface="Verdana" pitchFamily="34" charset="-122"/>
-                <a:cs typeface="Verdana" pitchFamily="34" charset="-120"/>
-              </a:rPr>
-              <a:t>Quick Twins chant + 5 finger-trick chorus answers.</a:t>
-            </a:r>
-            <a:endParaRPr lang="en-US" sz="1200" dirty="0"/>
-          </a:p>
-        </p:txBody>
-      </p:sp>
-      <p:sp>
-        <p:nvSpPr>
-          <p:cNvPr id="5" name="Text 3"/>
           <p:cNvSpPr/>
           <p:nvPr/>
         </p:nvSpPr>
@@ -2984,7 +3987,7 @@
                 <a:ea typeface="Georgia" pitchFamily="34" charset="-122"/>
                 <a:cs typeface="Georgia" pitchFamily="34" charset="-120"/>
               </a:rPr>
-              <a:t>Story (7 min) — "Let's see WHY"</a:t>
+              <a:t>Settle + chant (3 min)</a:t>
             </a:r>
             <a:endParaRPr lang="en-US" sz="1800" dirty="0"/>
           </a:p>
@@ -2998,379 +4001,7 @@
         </p:nvSpPr>
         <p:spPr>
           <a:xfrm>
-            <a:off x="634901" y="883593"/>
-            <a:ext cx="8102798" cy="281880"/>
-          </a:xfrm>
-          <a:prstGeom prst="rect">
-            <a:avLst/>
-          </a:prstGeom>
-          <a:noFill/>
-          <a:ln/>
-        </p:spPr>
-        <p:txBody>
-          <a:bodyPr wrap="square" lIns="0" tIns="0" rIns="0" bIns="0" rtlCol="0" anchor="t"/>
-          <a:lstStyle/>
-          <a:p>
-            <a:pPr algn="l" marL="342900" indent="-342900">
-              <a:lnSpc>
-                <a:spcPts val="1620"/>
-              </a:lnSpc>
-              <a:spcAft>
-                <a:spcPts val="300"/>
-              </a:spcAft>
-              <a:buSzPct val="100000"/>
-              <a:buChar char="•"/>
-            </a:pPr>
-            <a:r>
-              <a:rPr lang="en-US" sz="1200" i="1" dirty="0">
-                <a:solidFill>
-                  <a:srgbClr val="2C2C2C"/>
-                </a:solidFill>
-                <a:latin typeface="Verdana" pitchFamily="34" charset="0"/>
-                <a:ea typeface="Verdana" pitchFamily="34" charset="-122"/>
-                <a:cs typeface="Verdana" pitchFamily="34" charset="-120"/>
-              </a:rPr>
-              <a:t>"Yesterday I told you the trick. Today I'll show you why it works."</a:t>
-            </a:r>
-            <a:endParaRPr lang="en-US" sz="1200" dirty="0"/>
-          </a:p>
-        </p:txBody>
-      </p:sp>
-      <p:sp>
-        <p:nvSpPr>
-          <p:cNvPr id="5" name="Text 3"/>
-          <p:cNvSpPr/>
-          <p:nvPr/>
-        </p:nvSpPr>
-        <p:spPr>
-          <a:xfrm>
-            <a:off x="406301" y="1254323"/>
-            <a:ext cx="8498026" cy="445591"/>
-          </a:xfrm>
-          <a:prstGeom prst="rect">
-            <a:avLst/>
-          </a:prstGeom>
-          <a:noFill/>
-          <a:ln/>
-        </p:spPr>
-        <p:txBody>
-          <a:bodyPr wrap="square" lIns="0" tIns="0" rIns="0" bIns="0" rtlCol="0" anchor="t"/>
-          <a:lstStyle/>
-          <a:p>
-            <a:pPr algn="l" indent="0" marL="0">
-              <a:lnSpc>
-                <a:spcPts val="1680"/>
-              </a:lnSpc>
-              <a:spcBef>
-                <a:spcPts val="300"/>
-              </a:spcBef>
-              <a:spcAft>
-                <a:spcPts val="300"/>
-              </a:spcAft>
-              <a:buNone/>
-            </a:pPr>
-            <a:r>
-              <a:rPr lang="en-US" sz="1200" dirty="0">
-                <a:solidFill>
-                  <a:srgbClr val="2C2C2C"/>
-                </a:solidFill>
-                <a:latin typeface="Verdana" pitchFamily="34" charset="0"/>
-                <a:ea typeface="Verdana" pitchFamily="34" charset="-122"/>
-                <a:cs typeface="Verdana" pitchFamily="34" charset="-120"/>
-              </a:rPr>
-              <a:t>– Draw a </a:t>
-            </a:r>
-            <a:pPr algn="l" indent="0" marL="0">
-              <a:lnSpc>
-                <a:spcPts val="1680"/>
-              </a:lnSpc>
-              <a:spcBef>
-                <a:spcPts val="300"/>
-              </a:spcBef>
-              <a:spcAft>
-                <a:spcPts val="300"/>
-              </a:spcAft>
-              <a:buNone/>
-            </a:pPr>
-            <a:r>
-              <a:rPr lang="en-US" sz="1200" dirty="0">
-                <a:solidFill>
-                  <a:srgbClr val="2C2C2C"/>
-                </a:solidFill>
-                <a:latin typeface="Verdana" pitchFamily="34" charset="0"/>
-                <a:ea typeface="Verdana" pitchFamily="34" charset="-122"/>
-                <a:cs typeface="Verdana" pitchFamily="34" charset="-120"/>
-              </a:rPr>
-              <a:t>7 × 8</a:t>
-            </a:r>
-            <a:pPr algn="l" indent="0" marL="0">
-              <a:lnSpc>
-                <a:spcPts val="1680"/>
-              </a:lnSpc>
-              <a:spcBef>
-                <a:spcPts val="300"/>
-              </a:spcBef>
-              <a:spcAft>
-                <a:spcPts val="300"/>
-              </a:spcAft>
-              <a:buNone/>
-            </a:pPr>
-            <a:r>
-              <a:rPr lang="en-US" sz="1200" dirty="0">
-                <a:solidFill>
-                  <a:srgbClr val="2C2C2C"/>
-                </a:solidFill>
-                <a:latin typeface="Verdana" pitchFamily="34" charset="0"/>
-                <a:ea typeface="Verdana" pitchFamily="34" charset="-122"/>
-                <a:cs typeface="Verdana" pitchFamily="34" charset="-120"/>
-              </a:rPr>
-              <a:t> rectangle on the board: 7 columns, 8 rows. – Count the total dots together: 7 columns × 8 rows = 56 dots.</a:t>
-            </a:r>
-            <a:endParaRPr lang="en-US" sz="1200" dirty="0"/>
-          </a:p>
-        </p:txBody>
-      </p:sp>
-      <p:sp>
-        <p:nvSpPr>
-          <p:cNvPr id="6" name="Text 4"/>
-          <p:cNvSpPr/>
-          <p:nvPr/>
-        </p:nvSpPr>
-        <p:spPr>
-          <a:xfrm>
-            <a:off x="406301" y="1776115"/>
-            <a:ext cx="8498026" cy="639812"/>
-          </a:xfrm>
-          <a:prstGeom prst="rect">
-            <a:avLst/>
-          </a:prstGeom>
-          <a:noFill/>
-          <a:ln/>
-        </p:spPr>
-        <p:txBody>
-          <a:bodyPr wrap="square" lIns="0" tIns="0" rIns="0" bIns="0" rtlCol="0" anchor="t"/>
-          <a:lstStyle/>
-          <a:p>
-            <a:pPr algn="l" indent="0" marL="0">
-              <a:lnSpc>
-                <a:spcPts val="1680"/>
-              </a:lnSpc>
-              <a:spcBef>
-                <a:spcPts val="300"/>
-              </a:spcBef>
-              <a:spcAft>
-                <a:spcPts val="300"/>
-              </a:spcAft>
-              <a:buNone/>
-            </a:pPr>
-            <a:r>
-              <a:rPr lang="en-US" sz="1200" dirty="0">
-                <a:solidFill>
-                  <a:srgbClr val="2C2C2C"/>
-                </a:solidFill>
-                <a:latin typeface="Verdana" pitchFamily="34" charset="0"/>
-                <a:ea typeface="Verdana" pitchFamily="34" charset="-122"/>
-                <a:cs typeface="Verdana" pitchFamily="34" charset="-120"/>
-              </a:rPr>
-              <a:t>– Now divide the rectangle into regions: – A </a:t>
-            </a:r>
-            <a:pPr algn="l" indent="0" marL="0">
-              <a:lnSpc>
-                <a:spcPts val="1680"/>
-              </a:lnSpc>
-              <a:spcBef>
-                <a:spcPts val="300"/>
-              </a:spcBef>
-              <a:spcAft>
-                <a:spcPts val="300"/>
-              </a:spcAft>
-              <a:buNone/>
-            </a:pPr>
-            <a:r>
-              <a:rPr lang="en-US" sz="1200" b="1" dirty="0">
-                <a:solidFill>
-                  <a:srgbClr val="2C2C2C"/>
-                </a:solidFill>
-                <a:latin typeface="Verdana" pitchFamily="34" charset="0"/>
-                <a:ea typeface="Verdana" pitchFamily="34" charset="-122"/>
-                <a:cs typeface="Verdana" pitchFamily="34" charset="-120"/>
-              </a:rPr>
-              <a:t>5 × 5 block</a:t>
-            </a:r>
-            <a:pPr algn="l" indent="0" marL="0">
-              <a:lnSpc>
-                <a:spcPts val="1680"/>
-              </a:lnSpc>
-              <a:spcBef>
-                <a:spcPts val="300"/>
-              </a:spcBef>
-              <a:spcAft>
-                <a:spcPts val="300"/>
-              </a:spcAft>
-              <a:buNone/>
-            </a:pPr>
-            <a:r>
-              <a:rPr lang="en-US" sz="1200" dirty="0">
-                <a:solidFill>
-                  <a:srgbClr val="2C2C2C"/>
-                </a:solidFill>
-                <a:latin typeface="Verdana" pitchFamily="34" charset="0"/>
-                <a:ea typeface="Verdana" pitchFamily="34" charset="-122"/>
-                <a:cs typeface="Verdana" pitchFamily="34" charset="-120"/>
-              </a:rPr>
-              <a:t> in one corner (the "fully solid" block). – A </a:t>
-            </a:r>
-            <a:pPr algn="l" indent="0" marL="0">
-              <a:lnSpc>
-                <a:spcPts val="1680"/>
-              </a:lnSpc>
-              <a:spcBef>
-                <a:spcPts val="300"/>
-              </a:spcBef>
-              <a:spcAft>
-                <a:spcPts val="300"/>
-              </a:spcAft>
-              <a:buNone/>
-            </a:pPr>
-            <a:r>
-              <a:rPr lang="en-US" sz="1200" b="1" dirty="0">
-                <a:solidFill>
-                  <a:srgbClr val="2C2C2C"/>
-                </a:solidFill>
-                <a:latin typeface="Verdana" pitchFamily="34" charset="0"/>
-                <a:ea typeface="Verdana" pitchFamily="34" charset="-122"/>
-                <a:cs typeface="Verdana" pitchFamily="34" charset="-120"/>
-              </a:rPr>
-              <a:t>5 × 3 strip</a:t>
-            </a:r>
-            <a:pPr algn="l" indent="0" marL="0">
-              <a:lnSpc>
-                <a:spcPts val="1680"/>
-              </a:lnSpc>
-              <a:spcBef>
-                <a:spcPts val="300"/>
-              </a:spcBef>
-              <a:spcAft>
-                <a:spcPts val="300"/>
-              </a:spcAft>
-              <a:buNone/>
-            </a:pPr>
-            <a:r>
-              <a:rPr lang="en-US" sz="1200" dirty="0">
-                <a:solidFill>
-                  <a:srgbClr val="2C2C2C"/>
-                </a:solidFill>
-                <a:latin typeface="Verdana" pitchFamily="34" charset="0"/>
-                <a:ea typeface="Verdana" pitchFamily="34" charset="-122"/>
-                <a:cs typeface="Verdana" pitchFamily="34" charset="-120"/>
-              </a:rPr>
-              <a:t> below (because 8 = 5 + 3). – A </a:t>
-            </a:r>
-            <a:pPr algn="l" indent="0" marL="0">
-              <a:lnSpc>
-                <a:spcPts val="1680"/>
-              </a:lnSpc>
-              <a:spcBef>
-                <a:spcPts val="300"/>
-              </a:spcBef>
-              <a:spcAft>
-                <a:spcPts val="300"/>
-              </a:spcAft>
-              <a:buNone/>
-            </a:pPr>
-            <a:r>
-              <a:rPr lang="en-US" sz="1200" b="1" dirty="0">
-                <a:solidFill>
-                  <a:srgbClr val="2C2C2C"/>
-                </a:solidFill>
-                <a:latin typeface="Verdana" pitchFamily="34" charset="0"/>
-                <a:ea typeface="Verdana" pitchFamily="34" charset="-122"/>
-                <a:cs typeface="Verdana" pitchFamily="34" charset="-120"/>
-              </a:rPr>
-              <a:t>2 × 5 strip</a:t>
-            </a:r>
-            <a:pPr algn="l" indent="0" marL="0">
-              <a:lnSpc>
-                <a:spcPts val="1680"/>
-              </a:lnSpc>
-              <a:spcBef>
-                <a:spcPts val="300"/>
-              </a:spcBef>
-              <a:spcAft>
-                <a:spcPts val="300"/>
-              </a:spcAft>
-              <a:buNone/>
-            </a:pPr>
-            <a:r>
-              <a:rPr lang="en-US" sz="1200" dirty="0">
-                <a:solidFill>
-                  <a:srgbClr val="2C2C2C"/>
-                </a:solidFill>
-                <a:latin typeface="Verdana" pitchFamily="34" charset="0"/>
-                <a:ea typeface="Verdana" pitchFamily="34" charset="-122"/>
-                <a:cs typeface="Verdana" pitchFamily="34" charset="-120"/>
-              </a:rPr>
-              <a:t> to the side (because 7 = 5 + 2). – A </a:t>
-            </a:r>
-            <a:pPr algn="l" indent="0" marL="0">
-              <a:lnSpc>
-                <a:spcPts val="1680"/>
-              </a:lnSpc>
-              <a:spcBef>
-                <a:spcPts val="300"/>
-              </a:spcBef>
-              <a:spcAft>
-                <a:spcPts val="300"/>
-              </a:spcAft>
-              <a:buNone/>
-            </a:pPr>
-            <a:r>
-              <a:rPr lang="en-US" sz="1200" b="1" dirty="0">
-                <a:solidFill>
-                  <a:srgbClr val="2C2C2C"/>
-                </a:solidFill>
-                <a:latin typeface="Verdana" pitchFamily="34" charset="0"/>
-                <a:ea typeface="Verdana" pitchFamily="34" charset="-122"/>
-                <a:cs typeface="Verdana" pitchFamily="34" charset="-120"/>
-              </a:rPr>
-              <a:t>2 × 3 corner</a:t>
-            </a:r>
-            <a:pPr algn="l" indent="0" marL="0">
-              <a:lnSpc>
-                <a:spcPts val="1680"/>
-              </a:lnSpc>
-              <a:spcBef>
-                <a:spcPts val="300"/>
-              </a:spcBef>
-              <a:spcAft>
-                <a:spcPts val="300"/>
-              </a:spcAft>
-              <a:buNone/>
-            </a:pPr>
-            <a:r>
-              <a:rPr lang="en-US" sz="1200" dirty="0">
-                <a:solidFill>
-                  <a:srgbClr val="2C2C2C"/>
-                </a:solidFill>
-                <a:latin typeface="Verdana" pitchFamily="34" charset="0"/>
-                <a:ea typeface="Verdana" pitchFamily="34" charset="-122"/>
-                <a:cs typeface="Verdana" pitchFamily="34" charset="-120"/>
-              </a:rPr>
-              <a:t> (fingers UP × fingers UP).</a:t>
-            </a:r>
-            <a:endParaRPr lang="en-US" sz="1200" dirty="0"/>
-          </a:p>
-        </p:txBody>
-      </p:sp>
-      <p:sp>
-        <p:nvSpPr>
-          <p:cNvPr id="7" name="Text 5"/>
-          <p:cNvSpPr/>
-          <p:nvPr/>
-        </p:nvSpPr>
-        <p:spPr>
-          <a:xfrm>
-            <a:off x="406301" y="2492127"/>
+            <a:off x="406301" y="870942"/>
             <a:ext cx="8498026" cy="213271"/>
           </a:xfrm>
           <a:prstGeom prst="rect">
@@ -3404,7 +4035,7 @@
                 <a:ea typeface="Verdana" pitchFamily="34" charset="-122"/>
                 <a:cs typeface="Verdana" pitchFamily="34" charset="-120"/>
               </a:rPr>
-              <a:t>Total dots: 25 + 15 + 10 + 6 = 56. ✓</a:t>
+              <a:t>Quick Twins chant + 5 finger-trick chorus answers.</a:t>
             </a:r>
             <a:endParaRPr lang="en-US" sz="1200" dirty="0"/>
           </a:p>
@@ -3412,77 +4043,7 @@
       </p:sp>
       <p:sp>
         <p:nvSpPr>
-          <p:cNvPr id="8" name="Text 6"/>
-          <p:cNvSpPr/>
-          <p:nvPr/>
-        </p:nvSpPr>
-        <p:spPr>
-          <a:xfrm>
-            <a:off x="634901" y="2794248"/>
-            <a:ext cx="8102798" cy="525661"/>
-          </a:xfrm>
-          <a:prstGeom prst="rect">
-            <a:avLst/>
-          </a:prstGeom>
-          <a:noFill/>
-          <a:ln/>
-        </p:spPr>
-        <p:txBody>
-          <a:bodyPr wrap="square" lIns="0" tIns="0" rIns="0" bIns="0" rtlCol="0" anchor="t"/>
-          <a:lstStyle/>
-          <a:p>
-            <a:pPr algn="l" marL="342900" indent="-342900">
-              <a:lnSpc>
-                <a:spcPts val="1620"/>
-              </a:lnSpc>
-              <a:spcAft>
-                <a:spcPts val="300"/>
-              </a:spcAft>
-              <a:buSzPct val="100000"/>
-              <a:buChar char="•"/>
-            </a:pPr>
-            <a:r>
-              <a:rPr lang="en-US" sz="1200" i="1" dirty="0">
-                <a:solidFill>
-                  <a:srgbClr val="2C2C2C"/>
-                </a:solidFill>
-                <a:latin typeface="Verdana" pitchFamily="34" charset="0"/>
-                <a:ea typeface="Verdana" pitchFamily="34" charset="-122"/>
-                <a:cs typeface="Verdana" pitchFamily="34" charset="-120"/>
-              </a:rPr>
-              <a:t>"See the 2 × 3 corner? That's the fingers UP — and 2 × 3 = 6, the units of our answer."</a:t>
-            </a:r>
-            <a:endParaRPr lang="en-US" sz="1200" dirty="0"/>
-          </a:p>
-          <a:p>
-            <a:pPr algn="l" marL="342900" indent="-342900">
-              <a:lnSpc>
-                <a:spcPts val="1620"/>
-              </a:lnSpc>
-              <a:spcAft>
-                <a:spcPts val="300"/>
-              </a:spcAft>
-              <a:buSzPct val="100000"/>
-              <a:buChar char="•"/>
-            </a:pPr>
-            <a:r>
-              <a:rPr lang="en-US" sz="1200" i="1" dirty="0">
-                <a:solidFill>
-                  <a:srgbClr val="2C2C2C"/>
-                </a:solidFill>
-                <a:latin typeface="Verdana" pitchFamily="34" charset="0"/>
-                <a:ea typeface="Verdana" pitchFamily="34" charset="-122"/>
-                <a:cs typeface="Verdana" pitchFamily="34" charset="-120"/>
-              </a:rPr>
-              <a:t>"See the 5 × 5 block plus the two strips? Together they make 50 — the tens of our answer."</a:t>
-            </a:r>
-            <a:endParaRPr lang="en-US" sz="1200" dirty="0"/>
-          </a:p>
-        </p:txBody>
-      </p:sp>
-      <p:sp>
-        <p:nvSpPr>
-          <p:cNvPr id="9" name="Text 7"/>
+          <p:cNvPr id="5" name="Text 3"/>
           <p:cNvSpPr/>
           <p:nvPr/>
         </p:nvSpPr>
@@ -3632,7 +4193,7 @@
                 <a:ea typeface="Georgia" pitchFamily="34" charset="-122"/>
                 <a:cs typeface="Georgia" pitchFamily="34" charset="-120"/>
               </a:rPr>
-              <a:t>Drawing (15 min)</a:t>
+              <a:t>Story (7 min) — "Let's see WHY"</a:t>
             </a:r>
             <a:endParaRPr lang="en-US" sz="1800" dirty="0"/>
           </a:p>
@@ -3646,8 +4207,8 @@
         </p:nvSpPr>
         <p:spPr>
           <a:xfrm>
-            <a:off x="406301" y="870942"/>
-            <a:ext cx="8498026" cy="658862"/>
+            <a:off x="634901" y="883593"/>
+            <a:ext cx="8102798" cy="798016"/>
           </a:xfrm>
           <a:prstGeom prst="rect">
             <a:avLst/>
@@ -3659,13 +4220,55 @@
           <a:bodyPr wrap="square" lIns="0" tIns="0" rIns="0" bIns="0" rtlCol="0" anchor="t"/>
           <a:lstStyle/>
           <a:p>
+            <a:pPr algn="l" marL="342900" indent="-342900">
+              <a:lnSpc>
+                <a:spcPts val="1620"/>
+              </a:lnSpc>
+              <a:spcAft>
+                <a:spcPts val="300"/>
+              </a:spcAft>
+              <a:buSzPct val="100000"/>
+              <a:buChar char="•"/>
+            </a:pPr>
+            <a:r>
+              <a:rPr lang="en-US" sz="1200" i="1" dirty="0">
+                <a:solidFill>
+                  <a:srgbClr val="2C2C2C"/>
+                </a:solidFill>
+                <a:latin typeface="Verdana" pitchFamily="34" charset="0"/>
+                <a:ea typeface="Verdana" pitchFamily="34" charset="-122"/>
+                <a:cs typeface="Verdana" pitchFamily="34" charset="-120"/>
+              </a:rPr>
+              <a:t>"Yesterday I told you the trick. Today I'll show you why it works."</a:t>
+            </a:r>
+            <a:endParaRPr lang="en-US" sz="1200" dirty="0"/>
+          </a:p>
+          <a:p>
+            <a:pPr algn="l" marL="342900" indent="-342900">
+              <a:lnSpc>
+                <a:spcPts val="1620"/>
+              </a:lnSpc>
+              <a:spcAft>
+                <a:spcPts val="300"/>
+              </a:spcAft>
+              <a:buSzPct val="100000"/>
+              <a:buChar char="•"/>
+            </a:pPr>
+            <a:r>
+              <a:rPr lang="en-US" sz="1200" dirty="0">
+                <a:solidFill>
+                  <a:srgbClr val="2C2C2C"/>
+                </a:solidFill>
+                <a:latin typeface="Verdana" pitchFamily="34" charset="0"/>
+                <a:ea typeface="Verdana" pitchFamily="34" charset="-122"/>
+                <a:cs typeface="Verdana" pitchFamily="34" charset="-120"/>
+              </a:rPr>
+              <a:t>Draw a </a:t>
+            </a:r>
             <a:pPr algn="l" indent="0" marL="0">
               <a:lnSpc>
-                <a:spcPts val="1680"/>
-              </a:lnSpc>
-              <a:spcBef>
-                <a:spcPts val="300"/>
-              </a:spcBef>
+                <a:spcPts val="1620"/>
+              </a:lnSpc>
               <a:spcAft>
                 <a:spcPts val="300"/>
               </a:spcAft>
@@ -3680,15 +4283,12 @@
                 <a:ea typeface="Verdana" pitchFamily="34" charset="-122"/>
                 <a:cs typeface="Verdana" pitchFamily="34" charset="-120"/>
               </a:rPr>
-              <a:t>– Each child draws a </a:t>
+              <a:t>7 × 8</a:t>
             </a:r>
             <a:pPr algn="l" indent="0" marL="0">
               <a:lnSpc>
-                <a:spcPts val="1680"/>
-              </a:lnSpc>
-              <a:spcBef>
-                <a:spcPts val="300"/>
-              </a:spcBef>
+                <a:spcPts val="1620"/>
+              </a:lnSpc>
               <a:spcAft>
                 <a:spcPts val="300"/>
               </a:spcAft>
@@ -3703,19 +4303,20 @@
                 <a:ea typeface="Verdana" pitchFamily="34" charset="-122"/>
                 <a:cs typeface="Verdana" pitchFamily="34" charset="-120"/>
               </a:rPr>
-              <a:t>7 × 8</a:t>
-            </a:r>
-            <a:pPr algn="l" indent="0" marL="0">
-              <a:lnSpc>
-                <a:spcPts val="1680"/>
-              </a:lnSpc>
-              <a:spcBef>
-                <a:spcPts val="300"/>
-              </a:spcBef>
-              <a:spcAft>
-                <a:spcPts val="300"/>
-              </a:spcAft>
-              <a:buNone/>
+              <a:t> rectangle on the board: 7 columns, 8 rows.</a:t>
+            </a:r>
+            <a:endParaRPr lang="en-US" sz="1200" dirty="0"/>
+          </a:p>
+          <a:p>
+            <a:pPr algn="l" marL="342900" indent="-342900">
+              <a:lnSpc>
+                <a:spcPts val="1620"/>
+              </a:lnSpc>
+              <a:spcAft>
+                <a:spcPts val="300"/>
+              </a:spcAft>
+              <a:buSzPct val="100000"/>
+              <a:buChar char="•"/>
             </a:pPr>
             <a:r>
               <a:rPr lang="en-US" sz="1200" dirty="0">
@@ -3726,7 +4327,7 @@
                 <a:ea typeface="Verdana" pitchFamily="34" charset="-122"/>
                 <a:cs typeface="Verdana" pitchFamily="34" charset="-120"/>
               </a:rPr>
-              <a:t> dot rectangle on their A4 paper. – Colour the 2 × 3 corner one colour (the "fingers up" region). – Colour the rest a different colour (the "tens" region). – Count and label: "fingers-up corner = ___" and "rest = ___."</a:t>
+              <a:t>Count the total dots together: 7 columns × 8 rows = 56 dots.</a:t>
             </a:r>
             <a:endParaRPr lang="en-US" sz="1200" dirty="0"/>
           </a:p>
@@ -3884,7 +4485,7 @@
                 <a:ea typeface="Georgia" pitchFamily="34" charset="-122"/>
                 <a:cs typeface="Georgia" pitchFamily="34" charset="-120"/>
               </a:rPr>
-              <a:t>Show + chant (5 min)</a:t>
+              <a:t>Story (7 min) — "Let's see WHY" (cont.)</a:t>
             </a:r>
             <a:endParaRPr lang="en-US" sz="1800" dirty="0"/>
           </a:p>
@@ -3898,7 +4499,309 @@
         </p:nvSpPr>
         <p:spPr>
           <a:xfrm>
-            <a:off x="406301" y="870942"/>
+            <a:off x="634901" y="883593"/>
+            <a:ext cx="8102798" cy="1257002"/>
+          </a:xfrm>
+          <a:prstGeom prst="rect">
+            <a:avLst/>
+          </a:prstGeom>
+          <a:noFill/>
+          <a:ln/>
+        </p:spPr>
+        <p:txBody>
+          <a:bodyPr wrap="square" lIns="0" tIns="0" rIns="0" bIns="0" rtlCol="0" anchor="t"/>
+          <a:lstStyle/>
+          <a:p>
+            <a:pPr algn="l" marL="342900" indent="-342900">
+              <a:lnSpc>
+                <a:spcPts val="1620"/>
+              </a:lnSpc>
+              <a:spcAft>
+                <a:spcPts val="300"/>
+              </a:spcAft>
+              <a:buSzPct val="100000"/>
+              <a:buChar char="•"/>
+            </a:pPr>
+            <a:r>
+              <a:rPr lang="en-US" sz="1200" dirty="0">
+                <a:solidFill>
+                  <a:srgbClr val="2C2C2C"/>
+                </a:solidFill>
+                <a:latin typeface="Verdana" pitchFamily="34" charset="0"/>
+                <a:ea typeface="Verdana" pitchFamily="34" charset="-122"/>
+                <a:cs typeface="Verdana" pitchFamily="34" charset="-120"/>
+              </a:rPr>
+              <a:t>Now divide the rectangle into regions:</a:t>
+            </a:r>
+            <a:endParaRPr lang="en-US" sz="1200" dirty="0"/>
+          </a:p>
+          <a:p>
+            <a:pPr algn="l" marL="342900" indent="-342900">
+              <a:lnSpc>
+                <a:spcPts val="1620"/>
+              </a:lnSpc>
+              <a:spcAft>
+                <a:spcPts val="300"/>
+              </a:spcAft>
+              <a:buSzPct val="100000"/>
+              <a:buChar char="•"/>
+            </a:pPr>
+            <a:r>
+              <a:rPr lang="en-US" sz="1200" dirty="0">
+                <a:solidFill>
+                  <a:srgbClr val="2C2C2C"/>
+                </a:solidFill>
+                <a:latin typeface="Verdana" pitchFamily="34" charset="0"/>
+                <a:ea typeface="Verdana" pitchFamily="34" charset="-122"/>
+                <a:cs typeface="Verdana" pitchFamily="34" charset="-120"/>
+              </a:rPr>
+              <a:t>A </a:t>
+            </a:r>
+            <a:pPr algn="l" indent="0" marL="0">
+              <a:lnSpc>
+                <a:spcPts val="1620"/>
+              </a:lnSpc>
+              <a:spcAft>
+                <a:spcPts val="300"/>
+              </a:spcAft>
+              <a:buNone/>
+            </a:pPr>
+            <a:r>
+              <a:rPr lang="en-US" sz="1200" b="1" dirty="0">
+                <a:solidFill>
+                  <a:srgbClr val="2C2C2C"/>
+                </a:solidFill>
+                <a:latin typeface="Verdana" pitchFamily="34" charset="0"/>
+                <a:ea typeface="Verdana" pitchFamily="34" charset="-122"/>
+                <a:cs typeface="Verdana" pitchFamily="34" charset="-120"/>
+              </a:rPr>
+              <a:t>5 × 5 block</a:t>
+            </a:r>
+            <a:pPr algn="l" indent="0" marL="0">
+              <a:lnSpc>
+                <a:spcPts val="1620"/>
+              </a:lnSpc>
+              <a:spcAft>
+                <a:spcPts val="300"/>
+              </a:spcAft>
+              <a:buNone/>
+            </a:pPr>
+            <a:r>
+              <a:rPr lang="en-US" sz="1200" dirty="0">
+                <a:solidFill>
+                  <a:srgbClr val="2C2C2C"/>
+                </a:solidFill>
+                <a:latin typeface="Verdana" pitchFamily="34" charset="0"/>
+                <a:ea typeface="Verdana" pitchFamily="34" charset="-122"/>
+                <a:cs typeface="Verdana" pitchFamily="34" charset="-120"/>
+              </a:rPr>
+              <a:t> in one corner (the "fully solid" block).</a:t>
+            </a:r>
+            <a:endParaRPr lang="en-US" sz="1200" dirty="0"/>
+          </a:p>
+          <a:p>
+            <a:pPr algn="l" marL="342900" indent="-342900">
+              <a:lnSpc>
+                <a:spcPts val="1620"/>
+              </a:lnSpc>
+              <a:spcAft>
+                <a:spcPts val="300"/>
+              </a:spcAft>
+              <a:buSzPct val="100000"/>
+              <a:buChar char="•"/>
+            </a:pPr>
+            <a:r>
+              <a:rPr lang="en-US" sz="1200" dirty="0">
+                <a:solidFill>
+                  <a:srgbClr val="2C2C2C"/>
+                </a:solidFill>
+                <a:latin typeface="Verdana" pitchFamily="34" charset="0"/>
+                <a:ea typeface="Verdana" pitchFamily="34" charset="-122"/>
+                <a:cs typeface="Verdana" pitchFamily="34" charset="-120"/>
+              </a:rPr>
+              <a:t>A </a:t>
+            </a:r>
+            <a:pPr algn="l" indent="0" marL="0">
+              <a:lnSpc>
+                <a:spcPts val="1620"/>
+              </a:lnSpc>
+              <a:spcAft>
+                <a:spcPts val="300"/>
+              </a:spcAft>
+              <a:buNone/>
+            </a:pPr>
+            <a:r>
+              <a:rPr lang="en-US" sz="1200" b="1" dirty="0">
+                <a:solidFill>
+                  <a:srgbClr val="2C2C2C"/>
+                </a:solidFill>
+                <a:latin typeface="Verdana" pitchFamily="34" charset="0"/>
+                <a:ea typeface="Verdana" pitchFamily="34" charset="-122"/>
+                <a:cs typeface="Verdana" pitchFamily="34" charset="-120"/>
+              </a:rPr>
+              <a:t>5 × 3 strip</a:t>
+            </a:r>
+            <a:pPr algn="l" indent="0" marL="0">
+              <a:lnSpc>
+                <a:spcPts val="1620"/>
+              </a:lnSpc>
+              <a:spcAft>
+                <a:spcPts val="300"/>
+              </a:spcAft>
+              <a:buNone/>
+            </a:pPr>
+            <a:r>
+              <a:rPr lang="en-US" sz="1200" dirty="0">
+                <a:solidFill>
+                  <a:srgbClr val="2C2C2C"/>
+                </a:solidFill>
+                <a:latin typeface="Verdana" pitchFamily="34" charset="0"/>
+                <a:ea typeface="Verdana" pitchFamily="34" charset="-122"/>
+                <a:cs typeface="Verdana" pitchFamily="34" charset="-120"/>
+              </a:rPr>
+              <a:t> below (because 8 = 5 + 3).</a:t>
+            </a:r>
+            <a:endParaRPr lang="en-US" sz="1200" dirty="0"/>
+          </a:p>
+          <a:p>
+            <a:pPr algn="l" marL="342900" indent="-342900">
+              <a:lnSpc>
+                <a:spcPts val="1620"/>
+              </a:lnSpc>
+              <a:spcAft>
+                <a:spcPts val="300"/>
+              </a:spcAft>
+              <a:buSzPct val="100000"/>
+              <a:buChar char="•"/>
+            </a:pPr>
+            <a:r>
+              <a:rPr lang="en-US" sz="1200" dirty="0">
+                <a:solidFill>
+                  <a:srgbClr val="2C2C2C"/>
+                </a:solidFill>
+                <a:latin typeface="Verdana" pitchFamily="34" charset="0"/>
+                <a:ea typeface="Verdana" pitchFamily="34" charset="-122"/>
+                <a:cs typeface="Verdana" pitchFamily="34" charset="-120"/>
+              </a:rPr>
+              <a:t>A </a:t>
+            </a:r>
+            <a:pPr algn="l" indent="0" marL="0">
+              <a:lnSpc>
+                <a:spcPts val="1620"/>
+              </a:lnSpc>
+              <a:spcAft>
+                <a:spcPts val="300"/>
+              </a:spcAft>
+              <a:buNone/>
+            </a:pPr>
+            <a:r>
+              <a:rPr lang="en-US" sz="1200" b="1" dirty="0">
+                <a:solidFill>
+                  <a:srgbClr val="2C2C2C"/>
+                </a:solidFill>
+                <a:latin typeface="Verdana" pitchFamily="34" charset="0"/>
+                <a:ea typeface="Verdana" pitchFamily="34" charset="-122"/>
+                <a:cs typeface="Verdana" pitchFamily="34" charset="-120"/>
+              </a:rPr>
+              <a:t>2 × 5 strip</a:t>
+            </a:r>
+            <a:pPr algn="l" indent="0" marL="0">
+              <a:lnSpc>
+                <a:spcPts val="1620"/>
+              </a:lnSpc>
+              <a:spcAft>
+                <a:spcPts val="300"/>
+              </a:spcAft>
+              <a:buNone/>
+            </a:pPr>
+            <a:r>
+              <a:rPr lang="en-US" sz="1200" dirty="0">
+                <a:solidFill>
+                  <a:srgbClr val="2C2C2C"/>
+                </a:solidFill>
+                <a:latin typeface="Verdana" pitchFamily="34" charset="0"/>
+                <a:ea typeface="Verdana" pitchFamily="34" charset="-122"/>
+                <a:cs typeface="Verdana" pitchFamily="34" charset="-120"/>
+              </a:rPr>
+              <a:t> to the side (because 7 = 5 + 2).</a:t>
+            </a:r>
+            <a:endParaRPr lang="en-US" sz="1200" dirty="0"/>
+          </a:p>
+          <a:p>
+            <a:pPr algn="l" marL="342900" indent="-342900">
+              <a:lnSpc>
+                <a:spcPts val="1620"/>
+              </a:lnSpc>
+              <a:spcAft>
+                <a:spcPts val="300"/>
+              </a:spcAft>
+              <a:buSzPct val="100000"/>
+              <a:buChar char="•"/>
+            </a:pPr>
+            <a:r>
+              <a:rPr lang="en-US" sz="1200" dirty="0">
+                <a:solidFill>
+                  <a:srgbClr val="2C2C2C"/>
+                </a:solidFill>
+                <a:latin typeface="Verdana" pitchFamily="34" charset="0"/>
+                <a:ea typeface="Verdana" pitchFamily="34" charset="-122"/>
+                <a:cs typeface="Verdana" pitchFamily="34" charset="-120"/>
+              </a:rPr>
+              <a:t>A </a:t>
+            </a:r>
+            <a:pPr algn="l" indent="0" marL="0">
+              <a:lnSpc>
+                <a:spcPts val="1620"/>
+              </a:lnSpc>
+              <a:spcAft>
+                <a:spcPts val="300"/>
+              </a:spcAft>
+              <a:buNone/>
+            </a:pPr>
+            <a:r>
+              <a:rPr lang="en-US" sz="1200" b="1" dirty="0">
+                <a:solidFill>
+                  <a:srgbClr val="2C2C2C"/>
+                </a:solidFill>
+                <a:latin typeface="Verdana" pitchFamily="34" charset="0"/>
+                <a:ea typeface="Verdana" pitchFamily="34" charset="-122"/>
+                <a:cs typeface="Verdana" pitchFamily="34" charset="-120"/>
+              </a:rPr>
+              <a:t>2 × 3 corner</a:t>
+            </a:r>
+            <a:pPr algn="l" indent="0" marL="0">
+              <a:lnSpc>
+                <a:spcPts val="1620"/>
+              </a:lnSpc>
+              <a:spcAft>
+                <a:spcPts val="300"/>
+              </a:spcAft>
+              <a:buNone/>
+            </a:pPr>
+            <a:r>
+              <a:rPr lang="en-US" sz="1200" dirty="0">
+                <a:solidFill>
+                  <a:srgbClr val="2C2C2C"/>
+                </a:solidFill>
+                <a:latin typeface="Verdana" pitchFamily="34" charset="0"/>
+                <a:ea typeface="Verdana" pitchFamily="34" charset="-122"/>
+                <a:cs typeface="Verdana" pitchFamily="34" charset="-120"/>
+              </a:rPr>
+              <a:t> (fingers UP × fingers UP).</a:t>
+            </a:r>
+            <a:endParaRPr lang="en-US" sz="1200" dirty="0"/>
+          </a:p>
+        </p:txBody>
+      </p:sp>
+      <p:sp>
+        <p:nvSpPr>
+          <p:cNvPr id="5" name="Text 3"/>
+          <p:cNvSpPr/>
+          <p:nvPr/>
+        </p:nvSpPr>
+        <p:spPr>
+          <a:xfrm>
+            <a:off x="406301" y="2229445"/>
             <a:ext cx="8498026" cy="213271"/>
           </a:xfrm>
           <a:prstGeom prst="rect">
@@ -3932,7 +4835,7 @@
                 <a:ea typeface="Verdana" pitchFamily="34" charset="-122"/>
                 <a:cs typeface="Verdana" pitchFamily="34" charset="-120"/>
               </a:rPr>
-              <a:t>– 2 children share their drawings. – Final chant.</a:t>
+              <a:t>Total dots: 25 + 15 + 10 + 6 = 56. ✓</a:t>
             </a:r>
             <a:endParaRPr lang="en-US" sz="1200" dirty="0"/>
           </a:p>
@@ -3940,7 +4843,7 @@
       </p:sp>
       <p:sp>
         <p:nvSpPr>
-          <p:cNvPr id="5" name="Text 3"/>
+          <p:cNvPr id="6" name="Text 4"/>
           <p:cNvSpPr/>
           <p:nvPr/>
         </p:nvSpPr>
@@ -4090,7 +4993,7 @@
                 <a:ea typeface="Georgia" pitchFamily="34" charset="-122"/>
                 <a:cs typeface="Georgia" pitchFamily="34" charset="-120"/>
               </a:rPr>
-              <a:t>Homework</a:t>
+              <a:t>Story (7 min) — "Let's see WHY" (cont.)</a:t>
             </a:r>
             <a:endParaRPr lang="en-US" sz="1800" dirty="0"/>
           </a:p>
@@ -4104,8 +5007,8 @@
         </p:nvSpPr>
         <p:spPr>
           <a:xfrm>
-            <a:off x="406301" y="870942"/>
-            <a:ext cx="8498026" cy="213271"/>
+            <a:off x="634901" y="883593"/>
+            <a:ext cx="8102798" cy="525661"/>
           </a:xfrm>
           <a:prstGeom prst="rect">
             <a:avLst/>
@@ -4117,28 +5020,50 @@
           <a:bodyPr wrap="square" lIns="0" tIns="0" rIns="0" bIns="0" rtlCol="0" anchor="t"/>
           <a:lstStyle/>
           <a:p>
-            <a:pPr algn="l" indent="0" marL="0">
-              <a:lnSpc>
-                <a:spcPts val="1680"/>
-              </a:lnSpc>
-              <a:spcBef>
-                <a:spcPts val="300"/>
-              </a:spcBef>
-              <a:spcAft>
-                <a:spcPts val="300"/>
-              </a:spcAft>
-              <a:buNone/>
-            </a:pPr>
-            <a:r>
-              <a:rPr lang="en-US" sz="1200" dirty="0">
-                <a:solidFill>
-                  <a:srgbClr val="2C2C2C"/>
-                </a:solidFill>
-                <a:latin typeface="Verdana" pitchFamily="34" charset="0"/>
-                <a:ea typeface="Verdana" pitchFamily="34" charset="-122"/>
-                <a:cs typeface="Verdana" pitchFamily="34" charset="-120"/>
-              </a:rPr>
-              <a:t>– Pick another problem (6 × 7 OR 9 × 8) and draw the dot rectangle. Colour the corners. Bring it tomorrow.</a:t>
+            <a:pPr algn="l" marL="342900" indent="-342900">
+              <a:lnSpc>
+                <a:spcPts val="1620"/>
+              </a:lnSpc>
+              <a:spcAft>
+                <a:spcPts val="300"/>
+              </a:spcAft>
+              <a:buSzPct val="100000"/>
+              <a:buChar char="•"/>
+            </a:pPr>
+            <a:r>
+              <a:rPr lang="en-US" sz="1200" i="1" dirty="0">
+                <a:solidFill>
+                  <a:srgbClr val="2C2C2C"/>
+                </a:solidFill>
+                <a:latin typeface="Verdana" pitchFamily="34" charset="0"/>
+                <a:ea typeface="Verdana" pitchFamily="34" charset="-122"/>
+                <a:cs typeface="Verdana" pitchFamily="34" charset="-120"/>
+              </a:rPr>
+              <a:t>"See the 2 × 3 corner? That's the fingers UP — and 2 × 3 = 6, the units of our answer."</a:t>
+            </a:r>
+            <a:endParaRPr lang="en-US" sz="1200" dirty="0"/>
+          </a:p>
+          <a:p>
+            <a:pPr algn="l" marL="342900" indent="-342900">
+              <a:lnSpc>
+                <a:spcPts val="1620"/>
+              </a:lnSpc>
+              <a:spcAft>
+                <a:spcPts val="300"/>
+              </a:spcAft>
+              <a:buSzPct val="100000"/>
+              <a:buChar char="•"/>
+            </a:pPr>
+            <a:r>
+              <a:rPr lang="en-US" sz="1200" i="1" dirty="0">
+                <a:solidFill>
+                  <a:srgbClr val="2C2C2C"/>
+                </a:solidFill>
+                <a:latin typeface="Verdana" pitchFamily="34" charset="0"/>
+                <a:ea typeface="Verdana" pitchFamily="34" charset="-122"/>
+                <a:cs typeface="Verdana" pitchFamily="34" charset="-120"/>
+              </a:rPr>
+              <a:t>"See the 5 × 5 block plus the two strips? Together they make 50 — the tens of our answer."</a:t>
             </a:r>
             <a:endParaRPr lang="en-US" sz="1200" dirty="0"/>
           </a:p>
@@ -4296,7 +5221,7 @@
                 <a:ea typeface="Georgia" pitchFamily="34" charset="-122"/>
                 <a:cs typeface="Georgia" pitchFamily="34" charset="-120"/>
               </a:rPr>
-              <a:t>Differentiation</a:t>
+              <a:t>Drawing (15 min)</a:t>
             </a:r>
             <a:endParaRPr lang="en-US" sz="1800" dirty="0"/>
           </a:p>
@@ -4311,7 +5236,7 @@
         <p:spPr>
           <a:xfrm>
             <a:off x="634901" y="883593"/>
-            <a:ext cx="8102798" cy="759916"/>
+            <a:ext cx="8102798" cy="1041797"/>
           </a:xfrm>
           <a:prstGeom prst="rect">
             <a:avLst/>
@@ -4334,15 +5259,15 @@
               <a:buChar char="•"/>
             </a:pPr>
             <a:r>
-              <a:rPr lang="en-US" sz="1200" b="1" dirty="0">
-                <a:solidFill>
-                  <a:srgbClr val="2C2C2C"/>
-                </a:solidFill>
-                <a:latin typeface="Verdana" pitchFamily="34" charset="0"/>
-                <a:ea typeface="Verdana" pitchFamily="34" charset="-122"/>
-                <a:cs typeface="Verdana" pitchFamily="34" charset="-120"/>
-              </a:rPr>
-              <a:t>Tier up:</a:t>
+              <a:rPr lang="en-US" sz="1200" dirty="0">
+                <a:solidFill>
+                  <a:srgbClr val="2C2C2C"/>
+                </a:solidFill>
+                <a:latin typeface="Verdana" pitchFamily="34" charset="0"/>
+                <a:ea typeface="Verdana" pitchFamily="34" charset="-122"/>
+                <a:cs typeface="Verdana" pitchFamily="34" charset="-120"/>
+              </a:rPr>
+              <a:t>Each child draws a </a:t>
             </a:r>
             <a:pPr algn="l" indent="0" marL="0">
               <a:lnSpc>
@@ -4362,7 +5287,7 @@
                 <a:ea typeface="Verdana" pitchFamily="34" charset="-122"/>
                 <a:cs typeface="Verdana" pitchFamily="34" charset="-120"/>
               </a:rPr>
-              <a:t> Draw the same picture for </a:t>
+              <a:t>7 × 8</a:t>
             </a:r>
             <a:pPr algn="l" indent="0" marL="0">
               <a:lnSpc>
@@ -4382,27 +5307,7 @@
                 <a:ea typeface="Verdana" pitchFamily="34" charset="-122"/>
                 <a:cs typeface="Verdana" pitchFamily="34" charset="-120"/>
               </a:rPr>
-              <a:t>9 × 9</a:t>
-            </a:r>
-            <a:pPr algn="l" indent="0" marL="0">
-              <a:lnSpc>
-                <a:spcPts val="1620"/>
-              </a:lnSpc>
-              <a:spcAft>
-                <a:spcPts val="300"/>
-              </a:spcAft>
-              <a:buNone/>
-            </a:pPr>
-            <a:r>
-              <a:rPr lang="en-US" sz="1200" dirty="0">
-                <a:solidFill>
-                  <a:srgbClr val="2C2C2C"/>
-                </a:solidFill>
-                <a:latin typeface="Verdana" pitchFamily="34" charset="0"/>
-                <a:ea typeface="Verdana" pitchFamily="34" charset="-122"/>
-                <a:cs typeface="Verdana" pitchFamily="34" charset="-120"/>
-              </a:rPr>
-              <a:t>. The corner is 1 × 1 = 1 dot. The rest is 80 dots. Total = 81. ✓</a:t>
+              <a:t> dot rectangle on their A4 paper.</a:t>
             </a:r>
             <a:endParaRPr lang="en-US" sz="1200" dirty="0"/>
           </a:p>
@@ -4418,24 +5323,28 @@
               <a:buChar char="•"/>
             </a:pPr>
             <a:r>
-              <a:rPr lang="en-US" sz="1200" b="1" dirty="0">
-                <a:solidFill>
-                  <a:srgbClr val="2C2C2C"/>
-                </a:solidFill>
-                <a:latin typeface="Verdana" pitchFamily="34" charset="0"/>
-                <a:ea typeface="Verdana" pitchFamily="34" charset="-122"/>
-                <a:cs typeface="Verdana" pitchFamily="34" charset="-120"/>
-              </a:rPr>
-              <a:t>Tier down:</a:t>
-            </a:r>
-            <a:pPr algn="l" indent="0" marL="0">
+              <a:rPr lang="en-US" sz="1200" dirty="0">
+                <a:solidFill>
+                  <a:srgbClr val="2C2C2C"/>
+                </a:solidFill>
+                <a:latin typeface="Verdana" pitchFamily="34" charset="0"/>
+                <a:ea typeface="Verdana" pitchFamily="34" charset="-122"/>
+                <a:cs typeface="Verdana" pitchFamily="34" charset="-120"/>
+              </a:rPr>
+              <a:t>Colour the 2 × 3 corner one colour (the "fingers up" region).</a:t>
+            </a:r>
+            <a:endParaRPr lang="en-US" sz="1200" dirty="0"/>
+          </a:p>
+          <a:p>
+            <a:pPr algn="l" marL="342900" indent="-342900">
               <a:lnSpc>
                 <a:spcPts val="1620"/>
               </a:lnSpc>
               <a:spcAft>
                 <a:spcPts val="300"/>
               </a:spcAft>
-              <a:buNone/>
+              <a:buSzPct val="100000"/>
+              <a:buChar char="•"/>
             </a:pPr>
             <a:r>
               <a:rPr lang="en-US" sz="1200" dirty="0">
@@ -4446,7 +5355,31 @@
                 <a:ea typeface="Verdana" pitchFamily="34" charset="-122"/>
                 <a:cs typeface="Verdana" pitchFamily="34" charset="-120"/>
               </a:rPr>
-              <a:t> Pre-printed grid; child just colours the regions.</a:t>
+              <a:t>Colour the rest a different colour (the "tens" region).</a:t>
+            </a:r>
+            <a:endParaRPr lang="en-US" sz="1200" dirty="0"/>
+          </a:p>
+          <a:p>
+            <a:pPr algn="l" marL="342900" indent="-342900">
+              <a:lnSpc>
+                <a:spcPts val="1620"/>
+              </a:lnSpc>
+              <a:spcAft>
+                <a:spcPts val="300"/>
+              </a:spcAft>
+              <a:buSzPct val="100000"/>
+              <a:buChar char="•"/>
+            </a:pPr>
+            <a:r>
+              <a:rPr lang="en-US" sz="1200" dirty="0">
+                <a:solidFill>
+                  <a:srgbClr val="2C2C2C"/>
+                </a:solidFill>
+                <a:latin typeface="Verdana" pitchFamily="34" charset="0"/>
+                <a:ea typeface="Verdana" pitchFamily="34" charset="-122"/>
+                <a:cs typeface="Verdana" pitchFamily="34" charset="-120"/>
+              </a:rPr>
+              <a:t>Count and label: "fingers-up corner = ___" and "rest = ___."</a:t>
             </a:r>
             <a:endParaRPr lang="en-US" sz="1200" dirty="0"/>
           </a:p>
